--- a/presentation.pptx
+++ b/presentation.pptx
@@ -4404,14 +4404,14 @@
             <a:pPr lvl="0"/>
             <a:r>
               <a:rPr i="1"/>
-              <a:t>Programme communal d’aide à la création de fosses de plantation en pied de façade sur le domaine public</a:t>
+              <a:t>La commune crée des fosses de plantation sur le domaine public</a:t>
             </a:r>
           </a:p>
           <a:p>
             <a:pPr lvl="0"/>
             <a:r>
               <a:rPr i="1"/>
-              <a:t>Les habitants s’occupe des végétaux : arosage, taille, soins</a:t>
+              <a:t>Les habitants s’occupent des végétaux : arrosage, taille, soins</a:t>
             </a:r>
           </a:p>
         </p:txBody>

--- a/presentation.pptx
+++ b/presentation.pptx
@@ -3889,7 +3889,7 @@
             </a:pPr>
             <a:r>
               <a:rPr/>
-              <a:t>Conclusion</a:t>
+              <a:t>Planning</a:t>
             </a:r>
           </a:p>
         </p:txBody>
@@ -3914,28 +3914,35 @@
             </a:pPr>
             <a:r>
               <a:rPr b="1"/>
-              <a:t>Un projet simple, utile et fédérateur</a:t>
-            </a:r>
-          </a:p>
-          <a:p>
-            <a:pPr lvl="0"/>
-            <a:r>
-              <a:rPr/>
-              <a:t>Ce programme permet d’agir vite, à coût maîtrisé, avec les habitants, pour adapter le village aux canicules.</a:t>
-            </a:r>
-          </a:p>
-          <a:p>
-            <a:pPr lvl="0"/>
-            <a:r>
-              <a:rPr/>
-              <a:t>Les vrais bénéfices apparaîtront 2 ou 3 ans après le lancement, le temps que les végétaux poussent.</a:t>
-            </a:r>
-          </a:p>
-          <a:p>
-            <a:pPr lvl="0"/>
-            <a:r>
-              <a:rPr/>
-              <a:t>Un facteur clé de succès : Le portage et la mobilisation des élus.</a:t>
+              <a:t>Pour viser un deploiement Printemps 2027</a:t>
+            </a:r>
+          </a:p>
+          <a:p>
+            <a:pPr lvl="0"/>
+            <a:r>
+              <a:rPr/>
+              <a:t>Approbation par le conseil municipal : Octobre 2026</a:t>
+            </a:r>
+          </a:p>
+          <a:p>
+            <a:pPr lvl="0"/>
+            <a:r>
+              <a:rPr/>
+              <a:t>Réunion public fin 2026</a:t>
+            </a:r>
+          </a:p>
+          <a:p>
+            <a:pPr lvl="0"/>
+            <a:r>
+              <a:rPr/>
+              <a:t>Bulletin municipal : bouclage octobre 2026, parution Janvier 2027</a:t>
+            </a:r>
+          </a:p>
+          <a:p>
+            <a:pPr lvl="0"/>
+            <a:r>
+              <a:rPr/>
+              <a:t>Mise en place des fosses : Hiver/Printemps 2027</a:t>
             </a:r>
           </a:p>
         </p:txBody>
@@ -3946,6 +3953,99 @@
 </file>
 
 <file path=ppt/slides/slide18.xml><?xml version="1.0" encoding="utf-8"?>
+<p:sld xmlns:a="http://schemas.openxmlformats.org/drawingml/2006/main" xmlns:r="http://schemas.openxmlformats.org/officeDocument/2006/relationships" xmlns:p="http://schemas.openxmlformats.org/presentationml/2006/main">
+  <p:cSld>
+    <p:spTree>
+      <p:nvGrpSpPr>
+        <p:cNvPr id="1" name=""/>
+        <p:cNvGrpSpPr/>
+        <p:nvPr/>
+      </p:nvGrpSpPr>
+      <p:grpSpPr>
+        <a:xfrm>
+          <a:off x="0" y="0"/>
+          <a:ext cx="0" cy="0"/>
+          <a:chOff x="0" y="0"/>
+          <a:chExt cx="0" cy="0"/>
+        </a:xfrm>
+      </p:grpSpPr>
+      <p:sp>
+        <p:nvSpPr>
+          <p:cNvPr id="2" name="Title 1"/>
+          <p:cNvSpPr>
+            <a:spLocks noGrp="1"/>
+          </p:cNvSpPr>
+          <p:nvPr>
+            <p:ph type="title"/>
+          </p:nvPr>
+        </p:nvSpPr>
+        <p:spPr/>
+        <p:txBody>
+          <a:bodyPr/>
+          <a:lstStyle/>
+          <a:p>
+            <a:pPr lvl="0" indent="0" marL="0">
+              <a:buNone/>
+            </a:pPr>
+            <a:r>
+              <a:rPr/>
+              <a:t>Conclusion</a:t>
+            </a:r>
+          </a:p>
+        </p:txBody>
+      </p:sp>
+      <p:sp>
+        <p:nvSpPr>
+          <p:cNvPr id="3" name="Content Placeholder 2"/>
+          <p:cNvSpPr>
+            <a:spLocks noGrp="1"/>
+          </p:cNvSpPr>
+          <p:nvPr>
+            <p:ph idx="1"/>
+          </p:nvPr>
+        </p:nvSpPr>
+        <p:spPr/>
+        <p:txBody>
+          <a:bodyPr/>
+          <a:lstStyle/>
+          <a:p>
+            <a:pPr lvl="0" indent="0" marL="0">
+              <a:buNone/>
+            </a:pPr>
+            <a:r>
+              <a:rPr b="1"/>
+              <a:t>Un projet simple, utile et fédérateur</a:t>
+            </a:r>
+          </a:p>
+          <a:p>
+            <a:pPr lvl="0"/>
+            <a:r>
+              <a:rPr/>
+              <a:t>Ce programme permet d’agir vite, à coût maîtrisé, avec les habitants, pour adapter le village aux canicules.</a:t>
+            </a:r>
+          </a:p>
+          <a:p>
+            <a:pPr lvl="0"/>
+            <a:r>
+              <a:rPr/>
+              <a:t>Les vrais bénéfices apparaîtront 2 ou 3 ans après le lancement, le temps que les végétaux poussent.</a:t>
+            </a:r>
+          </a:p>
+          <a:p>
+            <a:pPr lvl="0"/>
+            <a:r>
+              <a:rPr/>
+              <a:t>Un facteur clé de succès : Le portage et la mobilisation des élus.</a:t>
+            </a:r>
+          </a:p>
+        </p:txBody>
+      </p:sp>
+    </p:spTree>
+  </p:cSld>
+</p:sld>
+</file>
+
+<file path=ppt/slides/slide19.xml><?xml version="1.0" encoding="utf-8"?>
 <p:sld xmlns:a="http://schemas.openxmlformats.org/drawingml/2006/main" xmlns:r="http://schemas.openxmlformats.org/officeDocument/2006/relationships" xmlns:p="http://schemas.openxmlformats.org/presentationml/2006/main">
   <p:cSld>
     <p:spTree>
@@ -4054,90 +4154,6 @@
 </p:sld>
 </file>
 
-<file path=ppt/slides/slide19.xml><?xml version="1.0" encoding="utf-8"?>
-<p:sld xmlns:a="http://schemas.openxmlformats.org/drawingml/2006/main" xmlns:r="http://schemas.openxmlformats.org/officeDocument/2006/relationships" xmlns:p="http://schemas.openxmlformats.org/presentationml/2006/main">
-  <p:cSld>
-    <p:spTree>
-      <p:nvGrpSpPr>
-        <p:cNvPr id="1" name=""/>
-        <p:cNvGrpSpPr/>
-        <p:nvPr/>
-      </p:nvGrpSpPr>
-      <p:grpSpPr>
-        <a:xfrm>
-          <a:off x="0" y="0"/>
-          <a:ext cx="0" cy="0"/>
-          <a:chOff x="0" y="0"/>
-          <a:chExt cx="0" cy="0"/>
-        </a:xfrm>
-      </p:grpSpPr>
-      <p:sp>
-        <p:nvSpPr>
-          <p:cNvPr id="2" name="Title 1"/>
-          <p:cNvSpPr>
-            <a:spLocks noGrp="1"/>
-          </p:cNvSpPr>
-          <p:nvPr>
-            <p:ph type="title"/>
-          </p:nvPr>
-        </p:nvSpPr>
-        <p:spPr/>
-        <p:txBody>
-          <a:bodyPr/>
-          <a:lstStyle/>
-          <a:p>
-            <a:pPr lvl="0" indent="0" marL="0">
-              <a:buNone/>
-            </a:pPr>
-            <a:r>
-              <a:rPr/>
-              <a:t>A développer</a:t>
-            </a:r>
-          </a:p>
-        </p:txBody>
-      </p:sp>
-      <p:sp>
-        <p:nvSpPr>
-          <p:cNvPr id="3" name="Content Placeholder 2"/>
-          <p:cNvSpPr>
-            <a:spLocks noGrp="1"/>
-          </p:cNvSpPr>
-          <p:nvPr>
-            <p:ph idx="1"/>
-          </p:nvPr>
-        </p:nvSpPr>
-        <p:spPr/>
-        <p:txBody>
-          <a:bodyPr/>
-          <a:lstStyle/>
-          <a:p>
-            <a:pPr lvl="0"/>
-            <a:r>
-              <a:rPr/>
-              <a:t>Zone pavillonnaire : végétaliser les bords de route.</a:t>
-            </a:r>
-          </a:p>
-          <a:p>
-            <a:pPr lvl="0"/>
-            <a:r>
-              <a:rPr/>
-              <a:t>Relations et contacts avec ABF et autres organismes officiels (CAUE 82).</a:t>
-            </a:r>
-          </a:p>
-          <a:p>
-            <a:pPr lvl="0"/>
-            <a:r>
-              <a:rPr/>
-              <a:t>Planning : Viser un déploiement début 2027 (Publication janvier 2027 dans le bulletin municipal; décision Conseil Municipal fin 2026)</a:t>
-            </a:r>
-          </a:p>
-        </p:txBody>
-      </p:sp>
-    </p:spTree>
-  </p:cSld>
-</p:sld>
-</file>
-
 <file path=ppt/slides/slide2.xml><?xml version="1.0" encoding="utf-8"?>
 <p:sld xmlns:a="http://schemas.openxmlformats.org/drawingml/2006/main" xmlns:r="http://schemas.openxmlformats.org/officeDocument/2006/relationships" xmlns:p="http://schemas.openxmlformats.org/presentationml/2006/main">
   <p:cSld>
@@ -4283,7 +4299,7 @@
             </a:pPr>
             <a:r>
               <a:rPr/>
-              <a:t>A développer (suite)</a:t>
+              <a:t>A développer</a:t>
             </a:r>
           </a:p>
         </p:txBody>
@@ -4306,21 +4322,21 @@
             <a:pPr lvl="0"/>
             <a:r>
               <a:rPr/>
-              <a:t>Aides au financement : “Le Fonds vert” (État) ,” Agences de l’Eau”, “Ma Solution pour le Climat” (Région)</a:t>
-            </a:r>
-          </a:p>
-          <a:p>
-            <a:pPr lvl="0"/>
-            <a:r>
-              <a:rPr/>
-              <a:t>Doctrine municipale de végétalisation des espaces publics ( végétalisation vs embellissement )</a:t>
-            </a:r>
-          </a:p>
-          <a:p>
-            <a:pPr lvl="0"/>
-            <a:r>
-              <a:rPr/>
-              <a:t>S’appuyer sur des associations (jardins partagés) pour une aide (fourniture des végétaux ? plantation ?)</a:t>
+              <a:t>Zone pavillonnaire : végétaliser les bords de route.</a:t>
+            </a:r>
+          </a:p>
+          <a:p>
+            <a:pPr lvl="0"/>
+            <a:r>
+              <a:rPr/>
+              <a:t>Relations et contacts avec ABF et autres organismes officiels (CAUE 82).</a:t>
+            </a:r>
+          </a:p>
+          <a:p>
+            <a:pPr lvl="0"/>
+            <a:r>
+              <a:rPr/>
+              <a:t>Aides au financement : “Le Fonds vert” (État) , “Ma Solution pour le Climat” (Région)</a:t>
             </a:r>
           </a:p>
         </p:txBody>
@@ -4404,14 +4420,14 @@
             <a:pPr lvl="0"/>
             <a:r>
               <a:rPr i="1"/>
-              <a:t>La commune crée des fosses de plantation sur le domaine public</a:t>
+              <a:t>La commune crée des fosses de plantation sur le domaine public.</a:t>
             </a:r>
           </a:p>
           <a:p>
             <a:pPr lvl="0"/>
             <a:r>
               <a:rPr i="1"/>
-              <a:t>Les habitants s’occupent des végétaux : arrosage, taille, soins</a:t>
+              <a:t>Les habitants s’occupent des végétaux : arrosage, taille, soins.</a:t>
             </a:r>
           </a:p>
         </p:txBody>

--- a/presentation.pptx
+++ b/presentation.pptx
@@ -3828,21 +3828,21 @@
             <a:pPr lvl="0"/>
             <a:r>
               <a:rPr/>
-              <a:t>La prise en charge par la mairie du coût des fosses et de certains végétaux.</a:t>
-            </a:r>
-          </a:p>
-          <a:p>
-            <a:pPr lvl="0"/>
-            <a:r>
-              <a:rPr/>
-              <a:t>Le principe de la convention.</a:t>
-            </a:r>
-          </a:p>
-          <a:p>
-            <a:pPr lvl="0"/>
-            <a:r>
-              <a:rPr/>
-              <a:t>La campagne de communication.</a:t>
+              <a:t>La prise en charge par la mairie du coût des fosses.</a:t>
+            </a:r>
+          </a:p>
+          <a:p>
+            <a:pPr lvl="0"/>
+            <a:r>
+              <a:rPr/>
+              <a:t>La convention qui sera proposée.</a:t>
+            </a:r>
+          </a:p>
+          <a:p>
+            <a:pPr lvl="0"/>
+            <a:r>
+              <a:rPr/>
+              <a:t>L’achat de 100 pieds de jasmins et 100 pieds de chevrefeuille (10 Euros par pied).</a:t>
             </a:r>
           </a:p>
         </p:txBody>
@@ -4606,14 +4606,7 @@
             <a:pPr lvl="0"/>
             <a:r>
               <a:rPr/>
-              <a:t>Lille – “Verdissons nos murs”</a:t>
-            </a:r>
-          </a:p>
-          <a:p>
-            <a:pPr lvl="0"/>
-            <a:r>
-              <a:rPr/>
-              <a:t>Végétaliser Banyuls, c’est permis ! </a:t>
+              <a:t>Marguerittes (Gard) </a:t>
             </a:r>
             <a:r>
               <a:rPr>
@@ -4626,11 +4619,24 @@
             <a:pPr lvl="0"/>
             <a:r>
               <a:rPr/>
-              <a:t>Saint-Nazaire-d’Aude : La commune fournit un « Kit de plantation » complet (plante locale, paillage, terreau et tuteur de protection) dès que la fosse est créée par la mairie. </a:t>
+              <a:t>Végétaliser Banyuls, c’est permis ! </a:t>
             </a:r>
             <a:r>
               <a:rPr>
                 <a:hlinkClick r:id="rId3"/>
+              </a:rPr>
+              <a:t>(site)</a:t>
+            </a:r>
+          </a:p>
+          <a:p>
+            <a:pPr lvl="0"/>
+            <a:r>
+              <a:rPr/>
+              <a:t>Saint-Nazaire-d’Aude : La commune fournit un « Kit de plantation » complet (plante locale, paillage, terreau et tuteur de protection) dès que la fosse est créée par la mairie. </a:t>
+            </a:r>
+            <a:r>
+              <a:rPr>
+                <a:hlinkClick r:id="rId4"/>
               </a:rPr>
               <a:t>(site)</a:t>
             </a:r>

--- a/presentation.pptx
+++ b/presentation.pptx
@@ -25,6 +25,7 @@
     <p:sldId id="273" r:id="rId19"/>
     <p:sldId id="274" r:id="rId20"/>
     <p:sldId id="275" r:id="rId21"/>
+    <p:sldId id="276" r:id="rId22"/>
   </p:sldIdLst>
   <p:sldSz cx="9144000" cy="5143500" type="screen16x9"/>
   <p:notesSz cx="6858000" cy="9144000"/>
@@ -3134,64 +3135,27 @@
           </a:p>
         </p:txBody>
       </p:sp>
-      <p:pic>
-        <p:nvPicPr>
-          <p:cNvPr descr="images/rue_0_s.jpg" id="0" name="Picture 1"/>
-          <p:cNvPicPr>
-            <a:picLocks noGrp="1" noChangeAspect="1"/>
-          </p:cNvPicPr>
-          <p:nvPr/>
-        </p:nvPicPr>
-        <p:blipFill>
-          <a:blip r:embed="rId2"/>
-          <a:stretch>
-            <a:fillRect/>
-          </a:stretch>
-        </p:blipFill>
-        <p:spPr bwMode="auto">
-          <a:xfrm>
-            <a:off x="2425700" y="1193800"/>
-            <a:ext cx="4305300" cy="2882900"/>
-          </a:xfrm>
-          <a:prstGeom prst="rect">
-            <a:avLst/>
-          </a:prstGeom>
-          <a:noFill/>
-          <a:ln w="9525">
-            <a:noFill/>
-            <a:headEnd/>
-            <a:tailEnd/>
-          </a:ln>
-        </p:spPr>
-      </p:pic>
-      <p:sp>
-        <p:nvSpPr>
-          <p:cNvPr id="1" name="TextBox 3"/>
-          <p:cNvSpPr txBox="1"/>
+      <p:sp>
+        <p:nvSpPr>
+          <p:cNvPr id="3" name="Content Placeholder 2"/>
+          <p:cNvSpPr>
+            <a:spLocks noGrp="1"/>
+          </p:cNvSpPr>
           <p:nvPr>
             <p:ph idx="1"/>
           </p:nvPr>
         </p:nvSpPr>
-        <p:spPr>
-          <a:xfrm>
-            <a:off x="457200" y="4076700"/>
-            <a:ext cx="8229600" cy="508000"/>
-          </a:xfrm>
-          <a:prstGeom prst="rect">
-            <a:avLst/>
-          </a:prstGeom>
-          <a:noFill/>
-        </p:spPr>
-        <p:txBody>
-          <a:bodyPr/>
-          <a:lstStyle/>
-          <a:p>
-            <a:pPr lvl="0" indent="0" marL="0" algn="ctr">
+        <p:spPr/>
+        <p:txBody>
+          <a:bodyPr/>
+          <a:lstStyle/>
+          <a:p>
+            <a:pPr lvl="0" indent="0" marL="0">
               <a:buNone/>
             </a:pPr>
             <a:r>
               <a:rPr/>
-              <a:t>Rue Cariben Avant/Après</a:t>
+              <a:t> </a:t>
             </a:r>
           </a:p>
         </p:txBody>
@@ -3238,44 +3202,69 @@
             </a:pPr>
             <a:r>
               <a:rPr/>
-              <a:t>Un parcours simple et rapide, compréhensible par tous</a:t>
-            </a:r>
-          </a:p>
-        </p:txBody>
-      </p:sp>
-      <p:sp>
-        <p:nvSpPr>
-          <p:cNvPr id="3" name="Content Placeholder 2"/>
-          <p:cNvSpPr>
-            <a:spLocks noGrp="1"/>
-          </p:cNvSpPr>
+              <a:t>Fosse de plantation pour pied de vigne en bordure de rue</a:t>
+            </a:r>
+          </a:p>
+        </p:txBody>
+      </p:sp>
+      <p:pic>
+        <p:nvPicPr>
+          <p:cNvPr descr="images/fosse.jpg" id="0" name="Picture 1"/>
+          <p:cNvPicPr>
+            <a:picLocks noGrp="1" noChangeAspect="1"/>
+          </p:cNvPicPr>
+          <p:nvPr/>
+        </p:nvPicPr>
+        <p:blipFill>
+          <a:blip r:embed="rId2"/>
+          <a:stretch>
+            <a:fillRect/>
+          </a:stretch>
+        </p:blipFill>
+        <p:spPr bwMode="auto">
+          <a:xfrm>
+            <a:off x="2654300" y="1193800"/>
+            <a:ext cx="3835400" cy="2882900"/>
+          </a:xfrm>
+          <a:prstGeom prst="rect">
+            <a:avLst/>
+          </a:prstGeom>
+          <a:noFill/>
+          <a:ln w="9525">
+            <a:noFill/>
+            <a:headEnd/>
+            <a:tailEnd/>
+          </a:ln>
+        </p:spPr>
+      </p:pic>
+      <p:sp>
+        <p:nvSpPr>
+          <p:cNvPr id="1" name="TextBox 3"/>
+          <p:cNvSpPr txBox="1"/>
           <p:nvPr>
             <p:ph idx="1"/>
           </p:nvPr>
         </p:nvSpPr>
-        <p:spPr/>
-        <p:txBody>
-          <a:bodyPr/>
-          <a:lstStyle/>
-          <a:p>
-            <a:pPr lvl="0"/>
-            <a:r>
-              <a:rPr/>
-              <a:t>Le participant signe une convention (en ligne ou sur papier).</a:t>
-            </a:r>
-          </a:p>
-          <a:p>
-            <a:pPr lvl="0"/>
-            <a:r>
-              <a:rPr/>
-              <a:t>Un rendez-vous est pris avec un représentant de la mairie : les positions des fosses sont marquées à la bombe sur le trottoir, en fonction des contraintes et du végétal visé.</a:t>
-            </a:r>
-          </a:p>
-          <a:p>
-            <a:pPr lvl="0"/>
-            <a:r>
-              <a:rPr/>
-              <a:t>Les services municipaux mettent en place les fosses et plantent éventuellement les végétaux choisis.</a:t>
+        <p:spPr>
+          <a:xfrm>
+            <a:off x="457200" y="4076700"/>
+            <a:ext cx="8229600" cy="508000"/>
+          </a:xfrm>
+          <a:prstGeom prst="rect">
+            <a:avLst/>
+          </a:prstGeom>
+          <a:noFill/>
+        </p:spPr>
+        <p:txBody>
+          <a:bodyPr/>
+          <a:lstStyle/>
+          <a:p>
+            <a:pPr lvl="0" indent="0" marL="0" algn="ctr">
+              <a:buNone/>
+            </a:pPr>
+            <a:r>
+              <a:rPr/>
+              <a:t>Fosse: réalisation</a:t>
             </a:r>
           </a:p>
         </p:txBody>
@@ -3322,7 +3311,7 @@
             </a:pPr>
             <a:r>
               <a:rPr/>
-              <a:t>La « convention » avec les riverains</a:t>
+              <a:t>Un parcours simple et rapide, compréhensible par tous</a:t>
             </a:r>
           </a:p>
         </p:txBody>
@@ -3342,14 +3331,24 @@
           <a:bodyPr/>
           <a:lstStyle/>
           <a:p>
-            <a:pPr lvl="0" indent="0" marL="0">
-              <a:buNone/>
-            </a:pPr>
-            <a:r>
-              <a:rPr>
-                <a:hlinkClick r:id="rId2"/>
-              </a:rPr>
-              <a:t>convention</a:t>
+            <a:pPr lvl="0"/>
+            <a:r>
+              <a:rPr/>
+              <a:t>Le participant signe une convention (en ligne ou sur papier).</a:t>
+            </a:r>
+          </a:p>
+          <a:p>
+            <a:pPr lvl="0"/>
+            <a:r>
+              <a:rPr/>
+              <a:t>Un rendez-vous est pris avec un représentant de la mairie : les positions des fosses sont marquées à la bombe sur le trottoir, en fonction des contraintes et du végétal visé.</a:t>
+            </a:r>
+          </a:p>
+          <a:p>
+            <a:pPr lvl="0"/>
+            <a:r>
+              <a:rPr/>
+              <a:t>Les services municipaux mettent en place les fosses et plantent éventuellement les végétaux choisis.</a:t>
             </a:r>
           </a:p>
         </p:txBody>
@@ -3360,6 +3359,80 @@
 </file>
 
 <file path=ppt/slides/slide12.xml><?xml version="1.0" encoding="utf-8"?>
+<p:sld xmlns:a="http://schemas.openxmlformats.org/drawingml/2006/main" xmlns:r="http://schemas.openxmlformats.org/officeDocument/2006/relationships" xmlns:p="http://schemas.openxmlformats.org/presentationml/2006/main">
+  <p:cSld>
+    <p:spTree>
+      <p:nvGrpSpPr>
+        <p:cNvPr id="1" name=""/>
+        <p:cNvGrpSpPr/>
+        <p:nvPr/>
+      </p:nvGrpSpPr>
+      <p:grpSpPr>
+        <a:xfrm>
+          <a:off x="0" y="0"/>
+          <a:ext cx="0" cy="0"/>
+          <a:chOff x="0" y="0"/>
+          <a:chExt cx="0" cy="0"/>
+        </a:xfrm>
+      </p:grpSpPr>
+      <p:sp>
+        <p:nvSpPr>
+          <p:cNvPr id="2" name="Title 1"/>
+          <p:cNvSpPr>
+            <a:spLocks noGrp="1"/>
+          </p:cNvSpPr>
+          <p:nvPr>
+            <p:ph type="title"/>
+          </p:nvPr>
+        </p:nvSpPr>
+        <p:spPr/>
+        <p:txBody>
+          <a:bodyPr/>
+          <a:lstStyle/>
+          <a:p>
+            <a:pPr lvl="0" indent="0" marL="0">
+              <a:buNone/>
+            </a:pPr>
+            <a:r>
+              <a:rPr/>
+              <a:t>La « convention » avec les riverains</a:t>
+            </a:r>
+          </a:p>
+        </p:txBody>
+      </p:sp>
+      <p:sp>
+        <p:nvSpPr>
+          <p:cNvPr id="3" name="Content Placeholder 2"/>
+          <p:cNvSpPr>
+            <a:spLocks noGrp="1"/>
+          </p:cNvSpPr>
+          <p:nvPr>
+            <p:ph idx="1"/>
+          </p:nvPr>
+        </p:nvSpPr>
+        <p:spPr/>
+        <p:txBody>
+          <a:bodyPr/>
+          <a:lstStyle/>
+          <a:p>
+            <a:pPr lvl="0" indent="0" marL="0">
+              <a:buNone/>
+            </a:pPr>
+            <a:r>
+              <a:rPr>
+                <a:hlinkClick r:id="rId2"/>
+              </a:rPr>
+              <a:t>convention</a:t>
+            </a:r>
+          </a:p>
+        </p:txBody>
+      </p:sp>
+    </p:spTree>
+  </p:cSld>
+</p:sld>
+</file>
+
+<file path=ppt/slides/slide13.xml><?xml version="1.0" encoding="utf-8"?>
 <p:sld xmlns:a="http://schemas.openxmlformats.org/drawingml/2006/main" xmlns:r="http://schemas.openxmlformats.org/officeDocument/2006/relationships" xmlns:p="http://schemas.openxmlformats.org/presentationml/2006/main">
   <p:cSld>
     <p:spTree>
@@ -3468,106 +3541,6 @@
 </p:sld>
 </file>
 
-<file path=ppt/slides/slide13.xml><?xml version="1.0" encoding="utf-8"?>
-<p:sld xmlns:a="http://schemas.openxmlformats.org/drawingml/2006/main" xmlns:r="http://schemas.openxmlformats.org/officeDocument/2006/relationships" xmlns:p="http://schemas.openxmlformats.org/presentationml/2006/main">
-  <p:cSld>
-    <p:spTree>
-      <p:nvGrpSpPr>
-        <p:cNvPr id="1" name=""/>
-        <p:cNvGrpSpPr/>
-        <p:nvPr/>
-      </p:nvGrpSpPr>
-      <p:grpSpPr>
-        <a:xfrm>
-          <a:off x="0" y="0"/>
-          <a:ext cx="0" cy="0"/>
-          <a:chOff x="0" y="0"/>
-          <a:chExt cx="0" cy="0"/>
-        </a:xfrm>
-      </p:grpSpPr>
-      <p:sp>
-        <p:nvSpPr>
-          <p:cNvPr id="2" name="Title 1"/>
-          <p:cNvSpPr>
-            <a:spLocks noGrp="1"/>
-          </p:cNvSpPr>
-          <p:nvPr>
-            <p:ph type="title"/>
-          </p:nvPr>
-        </p:nvSpPr>
-        <p:spPr/>
-        <p:txBody>
-          <a:bodyPr/>
-          <a:lstStyle/>
-          <a:p>
-            <a:pPr lvl="0" indent="0" marL="0">
-              <a:buNone/>
-            </a:pPr>
-            <a:r>
-              <a:rPr/>
-              <a:t>Risques juridiques et points de vigilance</a:t>
-            </a:r>
-          </a:p>
-        </p:txBody>
-      </p:sp>
-      <p:sp>
-        <p:nvSpPr>
-          <p:cNvPr id="3" name="Content Placeholder 2"/>
-          <p:cNvSpPr>
-            <a:spLocks noGrp="1"/>
-          </p:cNvSpPr>
-          <p:nvPr>
-            <p:ph idx="1"/>
-          </p:nvPr>
-        </p:nvSpPr>
-        <p:spPr/>
-        <p:txBody>
-          <a:bodyPr/>
-          <a:lstStyle/>
-          <a:p>
-            <a:pPr lvl="0" indent="0" marL="0">
-              <a:buNone/>
-            </a:pPr>
-            <a:r>
-              <a:rPr b="1"/>
-              <a:t>Les travaux doivent être facilement réversibles</a:t>
-            </a:r>
-          </a:p>
-          <a:p>
-            <a:pPr lvl="0"/>
-            <a:r>
-              <a:rPr/>
-              <a:t>Sécurité des piétons et de la circulation.</a:t>
-            </a:r>
-          </a:p>
-          <a:p>
-            <a:pPr lvl="0"/>
-            <a:r>
-              <a:rPr/>
-              <a:t>Réseaux enterrés et contraintes techniques.</a:t>
-            </a:r>
-          </a:p>
-          <a:p>
-            <a:pPr lvl="0"/>
-            <a:r>
-              <a:rPr/>
-              <a:t>Remplacement éventuel des végétaux.</a:t>
-            </a:r>
-          </a:p>
-          <a:p>
-            <a:pPr lvl="0"/>
-            <a:r>
-              <a:rPr/>
-              <a:t>Risques de non-respect des engagements du riverain.</a:t>
-            </a:r>
-          </a:p>
-        </p:txBody>
-      </p:sp>
-    </p:spTree>
-  </p:cSld>
-</p:sld>
-</file>
-
 <file path=ppt/slides/slide14.xml><?xml version="1.0" encoding="utf-8"?>
 <p:sld xmlns:a="http://schemas.openxmlformats.org/drawingml/2006/main" xmlns:r="http://schemas.openxmlformats.org/officeDocument/2006/relationships" xmlns:p="http://schemas.openxmlformats.org/presentationml/2006/main">
   <p:cSld>
@@ -3605,7 +3578,7 @@
             </a:pPr>
             <a:r>
               <a:rPr/>
-              <a:t>Coût pris en charge par la mairie</a:t>
+              <a:t>Risques juridiques et points de vigilance</a:t>
             </a:r>
           </a:p>
         </p:txBody>
@@ -3630,28 +3603,35 @@
             </a:pPr>
             <a:r>
               <a:rPr b="1"/>
-              <a:t>Un investissement ciblé et maîtrisé</a:t>
-            </a:r>
-          </a:p>
-          <a:p>
-            <a:pPr lvl="0"/>
-            <a:r>
-              <a:rPr/>
-              <a:t>La commune supporte le coût de la plantation.</a:t>
-            </a:r>
-          </a:p>
-          <a:p>
-            <a:pPr lvl="0"/>
-            <a:r>
-              <a:rPr/>
-              <a:t>Le budget couvre la création des fosses et les petits travaux associés.</a:t>
-            </a:r>
-          </a:p>
-          <a:p>
-            <a:pPr lvl="0"/>
-            <a:r>
-              <a:rPr/>
-              <a:t>Les habitants prennent en charge l’entretien (arrosage et taille).</a:t>
+              <a:t>Les travaux doivent être facilement réversibles</a:t>
+            </a:r>
+          </a:p>
+          <a:p>
+            <a:pPr lvl="0"/>
+            <a:r>
+              <a:rPr/>
+              <a:t>Sécurité des piétons et de la circulation.</a:t>
+            </a:r>
+          </a:p>
+          <a:p>
+            <a:pPr lvl="0"/>
+            <a:r>
+              <a:rPr/>
+              <a:t>Réseaux enterrés et contraintes techniques.</a:t>
+            </a:r>
+          </a:p>
+          <a:p>
+            <a:pPr lvl="0"/>
+            <a:r>
+              <a:rPr/>
+              <a:t>Remplacement éventuel des végétaux.</a:t>
+            </a:r>
+          </a:p>
+          <a:p>
+            <a:pPr lvl="0"/>
+            <a:r>
+              <a:rPr/>
+              <a:t>Risques de non-respect des engagements du riverain.</a:t>
             </a:r>
           </a:p>
         </p:txBody>
@@ -3698,7 +3678,7 @@
             </a:pPr>
             <a:r>
               <a:rPr/>
-              <a:t>Suivi et évaluation</a:t>
+              <a:t>Coût pris en charge par la mairie</a:t>
             </a:r>
           </a:p>
         </p:txBody>
@@ -3723,35 +3703,28 @@
             </a:pPr>
             <a:r>
               <a:rPr b="1"/>
-              <a:t>Mesurer simplement les résultats</a:t>
-            </a:r>
-          </a:p>
-          <a:p>
-            <a:pPr lvl="0"/>
-            <a:r>
-              <a:rPr/>
-              <a:t>Nombre de volontaires.</a:t>
-            </a:r>
-          </a:p>
-          <a:p>
-            <a:pPr lvl="0"/>
-            <a:r>
-              <a:rPr/>
-              <a:t>Nombre de fosses créées.</a:t>
-            </a:r>
-          </a:p>
-          <a:p>
-            <a:pPr lvl="0"/>
-            <a:r>
-              <a:rPr/>
-              <a:t>Taux d’échec (pas d’entretien).</a:t>
-            </a:r>
-          </a:p>
-          <a:p>
-            <a:pPr lvl="0"/>
-            <a:r>
-              <a:rPr/>
-              <a:t>Satisfaction des habitants.</a:t>
+              <a:t>Un investissement ciblé et maîtrisé</a:t>
+            </a:r>
+          </a:p>
+          <a:p>
+            <a:pPr lvl="0"/>
+            <a:r>
+              <a:rPr/>
+              <a:t>La commune supporte le coût de la plantation.</a:t>
+            </a:r>
+          </a:p>
+          <a:p>
+            <a:pPr lvl="0"/>
+            <a:r>
+              <a:rPr/>
+              <a:t>Le budget couvre la création des fosses et les petits travaux associés.</a:t>
+            </a:r>
+          </a:p>
+          <a:p>
+            <a:pPr lvl="0"/>
+            <a:r>
+              <a:rPr/>
+              <a:t>Les habitants prennent en charge l’entretien (arrosage et taille).</a:t>
             </a:r>
           </a:p>
         </p:txBody>
@@ -3798,7 +3771,7 @@
             </a:pPr>
             <a:r>
               <a:rPr/>
-              <a:t>Ce que le conseil municipal doit approuver</a:t>
+              <a:t>Suivi et évaluation</a:t>
             </a:r>
           </a:p>
         </p:txBody>
@@ -3818,31 +3791,40 @@
           <a:bodyPr/>
           <a:lstStyle/>
           <a:p>
-            <a:pPr lvl="0"/>
-            <a:r>
-              <a:rPr/>
-              <a:t>Le principe du programme.</a:t>
-            </a:r>
-          </a:p>
-          <a:p>
-            <a:pPr lvl="0"/>
-            <a:r>
-              <a:rPr/>
-              <a:t>La prise en charge par la mairie du coût des fosses.</a:t>
-            </a:r>
-          </a:p>
-          <a:p>
-            <a:pPr lvl="0"/>
-            <a:r>
-              <a:rPr/>
-              <a:t>La convention qui sera proposée.</a:t>
-            </a:r>
-          </a:p>
-          <a:p>
-            <a:pPr lvl="0"/>
-            <a:r>
-              <a:rPr/>
-              <a:t>L’achat de 100 pieds de jasmins et 100 pieds de chevrefeuille (10 Euros par pied).</a:t>
+            <a:pPr lvl="0" indent="0" marL="0">
+              <a:buNone/>
+            </a:pPr>
+            <a:r>
+              <a:rPr b="1"/>
+              <a:t>Mesurer simplement les résultats</a:t>
+            </a:r>
+          </a:p>
+          <a:p>
+            <a:pPr lvl="0"/>
+            <a:r>
+              <a:rPr/>
+              <a:t>Nombre de volontaires.</a:t>
+            </a:r>
+          </a:p>
+          <a:p>
+            <a:pPr lvl="0"/>
+            <a:r>
+              <a:rPr/>
+              <a:t>Nombre de fosses créées.</a:t>
+            </a:r>
+          </a:p>
+          <a:p>
+            <a:pPr lvl="0"/>
+            <a:r>
+              <a:rPr/>
+              <a:t>Taux d’échec (pas d’entretien).</a:t>
+            </a:r>
+          </a:p>
+          <a:p>
+            <a:pPr lvl="0"/>
+            <a:r>
+              <a:rPr/>
+              <a:t>Satisfaction des habitants.</a:t>
             </a:r>
           </a:p>
         </p:txBody>
@@ -3889,7 +3871,7 @@
             </a:pPr>
             <a:r>
               <a:rPr/>
-              <a:t>Planning</a:t>
+              <a:t>Ce que le conseil municipal doit approuver</a:t>
             </a:r>
           </a:p>
         </p:txBody>
@@ -3909,40 +3891,31 @@
           <a:bodyPr/>
           <a:lstStyle/>
           <a:p>
-            <a:pPr lvl="0" indent="0" marL="0">
-              <a:buNone/>
-            </a:pPr>
-            <a:r>
-              <a:rPr b="1"/>
-              <a:t>Pour viser un deploiement Printemps 2027</a:t>
-            </a:r>
-          </a:p>
-          <a:p>
-            <a:pPr lvl="0"/>
-            <a:r>
-              <a:rPr/>
-              <a:t>Approbation par le conseil municipal : Octobre 2026</a:t>
-            </a:r>
-          </a:p>
-          <a:p>
-            <a:pPr lvl="0"/>
-            <a:r>
-              <a:rPr/>
-              <a:t>Réunion public fin 2026</a:t>
-            </a:r>
-          </a:p>
-          <a:p>
-            <a:pPr lvl="0"/>
-            <a:r>
-              <a:rPr/>
-              <a:t>Bulletin municipal : bouclage octobre 2026, parution Janvier 2027</a:t>
-            </a:r>
-          </a:p>
-          <a:p>
-            <a:pPr lvl="0"/>
-            <a:r>
-              <a:rPr/>
-              <a:t>Mise en place des fosses : Hiver/Printemps 2027</a:t>
+            <a:pPr lvl="0"/>
+            <a:r>
+              <a:rPr/>
+              <a:t>Le principe du programme.</a:t>
+            </a:r>
+          </a:p>
+          <a:p>
+            <a:pPr lvl="0"/>
+            <a:r>
+              <a:rPr/>
+              <a:t>La prise en charge par la mairie du coût des fosses.</a:t>
+            </a:r>
+          </a:p>
+          <a:p>
+            <a:pPr lvl="0"/>
+            <a:r>
+              <a:rPr/>
+              <a:t>La convention qui sera proposée.</a:t>
+            </a:r>
+          </a:p>
+          <a:p>
+            <a:pPr lvl="0"/>
+            <a:r>
+              <a:rPr/>
+              <a:t>L’achat de 100 pieds de jasmins et 100 pieds de chevrefeuille (10 Euros par pied).</a:t>
             </a:r>
           </a:p>
         </p:txBody>
@@ -3989,7 +3962,7 @@
             </a:pPr>
             <a:r>
               <a:rPr/>
-              <a:t>Conclusion</a:t>
+              <a:t>Planning</a:t>
             </a:r>
           </a:p>
         </p:txBody>
@@ -4014,28 +3987,35 @@
             </a:pPr>
             <a:r>
               <a:rPr b="1"/>
-              <a:t>Un projet simple, utile et fédérateur</a:t>
-            </a:r>
-          </a:p>
-          <a:p>
-            <a:pPr lvl="0"/>
-            <a:r>
-              <a:rPr/>
-              <a:t>Ce programme permet d’agir vite, à coût maîtrisé, avec les habitants, pour adapter le village aux canicules.</a:t>
-            </a:r>
-          </a:p>
-          <a:p>
-            <a:pPr lvl="0"/>
-            <a:r>
-              <a:rPr/>
-              <a:t>Les vrais bénéfices apparaîtront 2 ou 3 ans après le lancement, le temps que les végétaux poussent.</a:t>
-            </a:r>
-          </a:p>
-          <a:p>
-            <a:pPr lvl="0"/>
-            <a:r>
-              <a:rPr/>
-              <a:t>Un facteur clé de succès : Le portage et la mobilisation des élus.</a:t>
+              <a:t>Pour viser un deploiement Printemps 2027</a:t>
+            </a:r>
+          </a:p>
+          <a:p>
+            <a:pPr lvl="0"/>
+            <a:r>
+              <a:rPr/>
+              <a:t>Approbation par le conseil municipal : Octobre 2026</a:t>
+            </a:r>
+          </a:p>
+          <a:p>
+            <a:pPr lvl="0"/>
+            <a:r>
+              <a:rPr/>
+              <a:t>Réunion public fin 2026</a:t>
+            </a:r>
+          </a:p>
+          <a:p>
+            <a:pPr lvl="0"/>
+            <a:r>
+              <a:rPr/>
+              <a:t>Bulletin municipal : bouclage octobre 2026, parution Janvier 2027</a:t>
+            </a:r>
+          </a:p>
+          <a:p>
+            <a:pPr lvl="0"/>
+            <a:r>
+              <a:rPr/>
+              <a:t>Mise en place des fosses : Hiver/Printemps 2027</a:t>
             </a:r>
           </a:p>
         </p:txBody>
@@ -4046,6 +4026,146 @@
 </file>
 
 <file path=ppt/slides/slide19.xml><?xml version="1.0" encoding="utf-8"?>
+<p:sld xmlns:a="http://schemas.openxmlformats.org/drawingml/2006/main" xmlns:r="http://schemas.openxmlformats.org/officeDocument/2006/relationships" xmlns:p="http://schemas.openxmlformats.org/presentationml/2006/main">
+  <p:cSld>
+    <p:spTree>
+      <p:nvGrpSpPr>
+        <p:cNvPr id="1" name=""/>
+        <p:cNvGrpSpPr/>
+        <p:nvPr/>
+      </p:nvGrpSpPr>
+      <p:grpSpPr>
+        <a:xfrm>
+          <a:off x="0" y="0"/>
+          <a:ext cx="0" cy="0"/>
+          <a:chOff x="0" y="0"/>
+          <a:chExt cx="0" cy="0"/>
+        </a:xfrm>
+      </p:grpSpPr>
+      <p:sp>
+        <p:nvSpPr>
+          <p:cNvPr id="2" name="Title 1"/>
+          <p:cNvSpPr>
+            <a:spLocks noGrp="1"/>
+          </p:cNvSpPr>
+          <p:nvPr>
+            <p:ph type="title"/>
+          </p:nvPr>
+        </p:nvSpPr>
+        <p:spPr/>
+        <p:txBody>
+          <a:bodyPr/>
+          <a:lstStyle/>
+          <a:p>
+            <a:pPr lvl="0" indent="0" marL="0">
+              <a:buNone/>
+            </a:pPr>
+            <a:r>
+              <a:rPr/>
+              <a:t>Conclusion</a:t>
+            </a:r>
+          </a:p>
+        </p:txBody>
+      </p:sp>
+      <p:sp>
+        <p:nvSpPr>
+          <p:cNvPr id="3" name="Content Placeholder 2"/>
+          <p:cNvSpPr>
+            <a:spLocks noGrp="1"/>
+          </p:cNvSpPr>
+          <p:nvPr>
+            <p:ph idx="1"/>
+          </p:nvPr>
+        </p:nvSpPr>
+        <p:spPr/>
+        <p:txBody>
+          <a:bodyPr/>
+          <a:lstStyle/>
+          <a:p>
+            <a:pPr lvl="0" indent="0" marL="0">
+              <a:buNone/>
+            </a:pPr>
+            <a:r>
+              <a:rPr b="1"/>
+              <a:t>Un projet simple, utile et fédérateur</a:t>
+            </a:r>
+          </a:p>
+          <a:p>
+            <a:pPr lvl="0"/>
+            <a:r>
+              <a:rPr/>
+              <a:t>Ce programme permet d’agir vite, à coût maîtrisé, avec les habitants, pour adapter le village aux canicules.</a:t>
+            </a:r>
+          </a:p>
+          <a:p>
+            <a:pPr lvl="0"/>
+            <a:r>
+              <a:rPr/>
+              <a:t>Les vrais bénéfices apparaîtront 2 ou 3 ans après le lancement, le temps que les végétaux poussent.</a:t>
+            </a:r>
+          </a:p>
+          <a:p>
+            <a:pPr lvl="0"/>
+            <a:r>
+              <a:rPr/>
+              <a:t>Un facteur clé de succès : Le portage et la mobilisation des élus.</a:t>
+            </a:r>
+          </a:p>
+        </p:txBody>
+      </p:sp>
+    </p:spTree>
+  </p:cSld>
+</p:sld>
+</file>
+
+<file path=ppt/slides/slide2.xml><?xml version="1.0" encoding="utf-8"?>
+<p:sld xmlns:a="http://schemas.openxmlformats.org/drawingml/2006/main" xmlns:r="http://schemas.openxmlformats.org/officeDocument/2006/relationships" xmlns:p="http://schemas.openxmlformats.org/presentationml/2006/main">
+  <p:cSld>
+    <p:spTree>
+      <p:nvGrpSpPr>
+        <p:cNvPr id="1" name=""/>
+        <p:cNvGrpSpPr/>
+        <p:nvPr/>
+      </p:nvGrpSpPr>
+      <p:grpSpPr>
+        <a:xfrm>
+          <a:off x="0" y="0"/>
+          <a:ext cx="0" cy="0"/>
+          <a:chOff x="0" y="0"/>
+          <a:chExt cx="0" cy="0"/>
+        </a:xfrm>
+      </p:grpSpPr>
+      <p:sp>
+        <p:nvSpPr>
+          <p:cNvPr id="2" name="Title 1"/>
+          <p:cNvSpPr>
+            <a:spLocks noGrp="1"/>
+          </p:cNvSpPr>
+          <p:nvPr>
+            <p:ph type="title"/>
+          </p:nvPr>
+        </p:nvSpPr>
+        <p:spPr/>
+        <p:txBody>
+          <a:bodyPr/>
+          <a:lstStyle/>
+          <a:p>
+            <a:pPr lvl="0" indent="0" marL="0">
+              <a:buNone/>
+            </a:pPr>
+            <a:r>
+              <a:rPr/>
+              <a:t>Rue Cariben Avant/Après</a:t>
+            </a:r>
+          </a:p>
+        </p:txBody>
+      </p:sp>
+    </p:spTree>
+  </p:cSld>
+</p:sld>
+</file>
+
+<file path=ppt/slides/slide20.xml><?xml version="1.0" encoding="utf-8"?>
 <p:sld xmlns:a="http://schemas.openxmlformats.org/drawingml/2006/main" xmlns:r="http://schemas.openxmlformats.org/officeDocument/2006/relationships" xmlns:p="http://schemas.openxmlformats.org/presentationml/2006/main">
   <p:cSld>
     <p:spTree>
@@ -4154,115 +4274,7 @@
 </p:sld>
 </file>
 
-<file path=ppt/slides/slide2.xml><?xml version="1.0" encoding="utf-8"?>
-<p:sld xmlns:a="http://schemas.openxmlformats.org/drawingml/2006/main" xmlns:r="http://schemas.openxmlformats.org/officeDocument/2006/relationships" xmlns:p="http://schemas.openxmlformats.org/presentationml/2006/main">
-  <p:cSld>
-    <p:spTree>
-      <p:nvGrpSpPr>
-        <p:cNvPr id="1" name=""/>
-        <p:cNvGrpSpPr/>
-        <p:nvPr/>
-      </p:nvGrpSpPr>
-      <p:grpSpPr>
-        <a:xfrm>
-          <a:off x="0" y="0"/>
-          <a:ext cx="0" cy="0"/>
-          <a:chOff x="0" y="0"/>
-          <a:chExt cx="0" cy="0"/>
-        </a:xfrm>
-      </p:grpSpPr>
-      <p:sp>
-        <p:nvSpPr>
-          <p:cNvPr id="2" name="Title 1"/>
-          <p:cNvSpPr>
-            <a:spLocks noGrp="1"/>
-          </p:cNvSpPr>
-          <p:nvPr>
-            <p:ph type="title"/>
-          </p:nvPr>
-        </p:nvSpPr>
-        <p:spPr/>
-        <p:txBody>
-          <a:bodyPr/>
-          <a:lstStyle/>
-          <a:p>
-            <a:pPr lvl="0" indent="0" marL="0">
-              <a:buNone/>
-            </a:pPr>
-            <a:r>
-              <a:rPr/>
-              <a:t>Pourquoi végétaliser ?</a:t>
-            </a:r>
-          </a:p>
-        </p:txBody>
-      </p:sp>
-      <p:sp>
-        <p:nvSpPr>
-          <p:cNvPr id="3" name="Content Placeholder 2"/>
-          <p:cNvSpPr>
-            <a:spLocks noGrp="1"/>
-          </p:cNvSpPr>
-          <p:nvPr>
-            <p:ph idx="1"/>
-          </p:nvPr>
-        </p:nvSpPr>
-        <p:spPr/>
-        <p:txBody>
-          <a:bodyPr/>
-          <a:lstStyle/>
-          <a:p>
-            <a:pPr lvl="0" indent="0" marL="0">
-              <a:buNone/>
-            </a:pPr>
-            <a:r>
-              <a:rPr b="1"/>
-              <a:t>Adapter le village à la succession de canicules </a:t>
-            </a:r>
-          </a:p>
-          <a:p>
-            <a:pPr lvl="0"/>
-            <a:r>
-              <a:rPr/>
-              <a:t>Réduire la température des façades de </a:t>
-            </a:r>
-            <a:r>
-              <a:rPr b="1"/>
-              <a:t>4 à 6 °C</a:t>
-            </a:r>
-            <a:r>
-              <a:rPr/>
-              <a:t>.</a:t>
-            </a:r>
-          </a:p>
-          <a:p>
-            <a:pPr lvl="0"/>
-            <a:r>
-              <a:rPr/>
-              <a:t>Améliorer le confort d’été des riverains et des passants.</a:t>
-            </a:r>
-          </a:p>
-          <a:p>
-            <a:pPr lvl="0"/>
-            <a:r>
-              <a:rPr/>
-              <a:t>Permettre aux riverains, sous le contrôle de la mairie, de planter sur les trottoirs: Il est normalement interdit de modifier le domaine public.</a:t>
-            </a:r>
-          </a:p>
-          <a:p>
-            <a:pPr lvl="0"/>
-            <a:r>
-              <a:rPr/>
-              <a:t>Agir : ne plus subir son environnement.</a:t>
-            </a:r>
-          </a:p>
-        </p:txBody>
-      </p:sp>
-    </p:spTree>
-  </p:cSld>
-</p:sld>
-</file>
-
-<file path=ppt/slides/slide20.xml><?xml version="1.0" encoding="utf-8"?>
+<file path=ppt/slides/slide21.xml><?xml version="1.0" encoding="utf-8"?>
 <p:sld xmlns:a="http://schemas.openxmlformats.org/drawingml/2006/main" xmlns:r="http://schemas.openxmlformats.org/officeDocument/2006/relationships" xmlns:p="http://schemas.openxmlformats.org/presentationml/2006/main">
   <p:cSld>
     <p:spTree>
@@ -4383,7 +4395,7 @@
             </a:pPr>
             <a:r>
               <a:rPr/>
-              <a:t>Comment végétaliser le village</a:t>
+              <a:t>Pourquoi végétaliser ?</a:t>
             </a:r>
           </a:p>
         </p:txBody>
@@ -4403,31 +4415,48 @@
           <a:bodyPr/>
           <a:lstStyle/>
           <a:p>
-            <a:pPr lvl="0"/>
+            <a:pPr lvl="0" indent="0" marL="0">
+              <a:buNone/>
+            </a:pPr>
             <a:r>
               <a:rPr b="1"/>
-              <a:t>La mairie n’a pas les moyens d’entretenir des plantations en nombre</a:t>
-            </a:r>
-          </a:p>
-          <a:p>
-            <a:pPr lvl="0"/>
+              <a:t>Adapter le village à la succession de canicules </a:t>
+            </a:r>
+          </a:p>
+          <a:p>
+            <a:pPr lvl="0"/>
+            <a:r>
+              <a:rPr/>
+              <a:t>Réduire la température des façades de </a:t>
+            </a:r>
             <a:r>
               <a:rPr b="1"/>
-              <a:t>Pour avoir des résultats rapides et massifs, il faut associer les habitants</a:t>
-            </a:r>
-          </a:p>
-          <a:p>
-            <a:pPr lvl="0"/>
-            <a:r>
-              <a:rPr i="1"/>
-              <a:t>La commune crée des fosses de plantation sur le domaine public.</a:t>
-            </a:r>
-          </a:p>
-          <a:p>
-            <a:pPr lvl="0"/>
-            <a:r>
-              <a:rPr i="1"/>
-              <a:t>Les habitants s’occupent des végétaux : arrosage, taille, soins.</a:t>
+              <a:t>4 à 6 °C</a:t>
+            </a:r>
+            <a:r>
+              <a:rPr/>
+              <a:t>.</a:t>
+            </a:r>
+          </a:p>
+          <a:p>
+            <a:pPr lvl="0"/>
+            <a:r>
+              <a:rPr/>
+              <a:t>Améliorer le confort d’été des riverains et des passants.</a:t>
+            </a:r>
+          </a:p>
+          <a:p>
+            <a:pPr lvl="0"/>
+            <a:r>
+              <a:rPr/>
+              <a:t>Permettre aux riverains, sous le contrôle de la mairie, de planter sur les trottoirs: Il est normalement interdit de modifier le domaine public.</a:t>
+            </a:r>
+          </a:p>
+          <a:p>
+            <a:pPr lvl="0"/>
+            <a:r>
+              <a:rPr/>
+              <a:t>Agir : ne plus subir son environnement.</a:t>
             </a:r>
           </a:p>
         </p:txBody>
@@ -4438,6 +4467,97 @@
 </file>
 
 <file path=ppt/slides/slide4.xml><?xml version="1.0" encoding="utf-8"?>
+<p:sld xmlns:a="http://schemas.openxmlformats.org/drawingml/2006/main" xmlns:r="http://schemas.openxmlformats.org/officeDocument/2006/relationships" xmlns:p="http://schemas.openxmlformats.org/presentationml/2006/main">
+  <p:cSld>
+    <p:spTree>
+      <p:nvGrpSpPr>
+        <p:cNvPr id="1" name=""/>
+        <p:cNvGrpSpPr/>
+        <p:nvPr/>
+      </p:nvGrpSpPr>
+      <p:grpSpPr>
+        <a:xfrm>
+          <a:off x="0" y="0"/>
+          <a:ext cx="0" cy="0"/>
+          <a:chOff x="0" y="0"/>
+          <a:chExt cx="0" cy="0"/>
+        </a:xfrm>
+      </p:grpSpPr>
+      <p:sp>
+        <p:nvSpPr>
+          <p:cNvPr id="2" name="Title 1"/>
+          <p:cNvSpPr>
+            <a:spLocks noGrp="1"/>
+          </p:cNvSpPr>
+          <p:nvPr>
+            <p:ph type="title"/>
+          </p:nvPr>
+        </p:nvSpPr>
+        <p:spPr/>
+        <p:txBody>
+          <a:bodyPr/>
+          <a:lstStyle/>
+          <a:p>
+            <a:pPr lvl="0" indent="0" marL="0">
+              <a:buNone/>
+            </a:pPr>
+            <a:r>
+              <a:rPr/>
+              <a:t>Comment végétaliser le village</a:t>
+            </a:r>
+          </a:p>
+        </p:txBody>
+      </p:sp>
+      <p:sp>
+        <p:nvSpPr>
+          <p:cNvPr id="3" name="Content Placeholder 2"/>
+          <p:cNvSpPr>
+            <a:spLocks noGrp="1"/>
+          </p:cNvSpPr>
+          <p:nvPr>
+            <p:ph idx="1"/>
+          </p:nvPr>
+        </p:nvSpPr>
+        <p:spPr/>
+        <p:txBody>
+          <a:bodyPr/>
+          <a:lstStyle/>
+          <a:p>
+            <a:pPr lvl="0"/>
+            <a:r>
+              <a:rPr b="1"/>
+              <a:t>La mairie n’a pas les moyens d’entretenir des plantations en nombre</a:t>
+            </a:r>
+          </a:p>
+          <a:p>
+            <a:pPr lvl="0"/>
+            <a:r>
+              <a:rPr b="1"/>
+              <a:t>Pour avoir des résultats rapides et massifs, il faut associer les habitants</a:t>
+            </a:r>
+          </a:p>
+          <a:p>
+            <a:pPr lvl="0"/>
+            <a:r>
+              <a:rPr i="1"/>
+              <a:t>La commune crée des fosses de plantation sur le domaine public.</a:t>
+            </a:r>
+          </a:p>
+          <a:p>
+            <a:pPr lvl="0"/>
+            <a:r>
+              <a:rPr i="1"/>
+              <a:t>Les habitants s’occupent des végétaux : arrosage, taille, soins.</a:t>
+            </a:r>
+          </a:p>
+        </p:txBody>
+      </p:sp>
+    </p:spTree>
+  </p:cSld>
+</p:sld>
+</file>
+
+<file path=ppt/slides/slide5.xml><?xml version="1.0" encoding="utf-8"?>
 <p:sld xmlns:a="http://schemas.openxmlformats.org/drawingml/2006/main" xmlns:r="http://schemas.openxmlformats.org/officeDocument/2006/relationships" xmlns:p="http://schemas.openxmlformats.org/presentationml/2006/main">
   <p:cSld>
     <p:spTree>
@@ -4546,108 +4666,6 @@
 </p:sld>
 </file>
 
-<file path=ppt/slides/slide5.xml><?xml version="1.0" encoding="utf-8"?>
-<p:sld xmlns:a="http://schemas.openxmlformats.org/drawingml/2006/main" xmlns:r="http://schemas.openxmlformats.org/officeDocument/2006/relationships" xmlns:p="http://schemas.openxmlformats.org/presentationml/2006/main">
-  <p:cSld>
-    <p:spTree>
-      <p:nvGrpSpPr>
-        <p:cNvPr id="1" name=""/>
-        <p:cNvGrpSpPr/>
-        <p:nvPr/>
-      </p:nvGrpSpPr>
-      <p:grpSpPr>
-        <a:xfrm>
-          <a:off x="0" y="0"/>
-          <a:ext cx="0" cy="0"/>
-          <a:chOff x="0" y="0"/>
-          <a:chExt cx="0" cy="0"/>
-        </a:xfrm>
-      </p:grpSpPr>
-      <p:sp>
-        <p:nvSpPr>
-          <p:cNvPr id="2" name="Title 1"/>
-          <p:cNvSpPr>
-            <a:spLocks noGrp="1"/>
-          </p:cNvSpPr>
-          <p:nvPr>
-            <p:ph type="title"/>
-          </p:nvPr>
-        </p:nvSpPr>
-        <p:spPr/>
-        <p:txBody>
-          <a:bodyPr/>
-          <a:lstStyle/>
-          <a:p>
-            <a:pPr lvl="0" indent="0" marL="0">
-              <a:buNone/>
-            </a:pPr>
-            <a:r>
-              <a:rPr/>
-              <a:t>Un projet inspiré d’exemples réussis</a:t>
-            </a:r>
-          </a:p>
-        </p:txBody>
-      </p:sp>
-      <p:sp>
-        <p:nvSpPr>
-          <p:cNvPr id="3" name="Content Placeholder 2"/>
-          <p:cNvSpPr>
-            <a:spLocks noGrp="1"/>
-          </p:cNvSpPr>
-          <p:nvPr>
-            <p:ph idx="1"/>
-          </p:nvPr>
-        </p:nvSpPr>
-        <p:spPr/>
-        <p:txBody>
-          <a:bodyPr/>
-          <a:lstStyle/>
-          <a:p>
-            <a:pPr lvl="0"/>
-            <a:r>
-              <a:rPr/>
-              <a:t>Marguerittes (Gard) </a:t>
-            </a:r>
-            <a:r>
-              <a:rPr>
-                <a:hlinkClick r:id="rId2"/>
-              </a:rPr>
-              <a:t>(site)</a:t>
-            </a:r>
-          </a:p>
-          <a:p>
-            <a:pPr lvl="0"/>
-            <a:r>
-              <a:rPr/>
-              <a:t>Végétaliser Banyuls, c’est permis ! </a:t>
-            </a:r>
-            <a:r>
-              <a:rPr>
-                <a:hlinkClick r:id="rId3"/>
-              </a:rPr>
-              <a:t>(site)</a:t>
-            </a:r>
-          </a:p>
-          <a:p>
-            <a:pPr lvl="0"/>
-            <a:r>
-              <a:rPr/>
-              <a:t>Saint-Nazaire-d’Aude : La commune fournit un « Kit de plantation » complet (plante locale, paillage, terreau et tuteur de protection) dès que la fosse est créée par la mairie. </a:t>
-            </a:r>
-            <a:r>
-              <a:rPr>
-                <a:hlinkClick r:id="rId4"/>
-              </a:rPr>
-              <a:t>(site)</a:t>
-            </a:r>
-          </a:p>
-        </p:txBody>
-      </p:sp>
-    </p:spTree>
-  </p:cSld>
-</p:sld>
-</file>
-
 <file path=ppt/slides/slide6.xml><?xml version="1.0" encoding="utf-8"?>
 <p:sld xmlns:a="http://schemas.openxmlformats.org/drawingml/2006/main" xmlns:r="http://schemas.openxmlformats.org/officeDocument/2006/relationships" xmlns:p="http://schemas.openxmlformats.org/presentationml/2006/main">
   <p:cSld>
@@ -4685,7 +4703,7 @@
             </a:pPr>
             <a:r>
               <a:rPr/>
-              <a:t>Organismes officiels d’accompagnement</a:t>
+              <a:t>Un projet inspiré d’exemples réussis</a:t>
             </a:r>
           </a:p>
         </p:txBody>
@@ -4708,27 +4726,39 @@
             <a:pPr lvl="0"/>
             <a:r>
               <a:rPr/>
-              <a:t>Le CAUE 82 (Conseil d’Architecture, d’Urbanisme et de l’Environnement) est un organisme investi d’une mission d’intérêt public.</a:t>
-            </a:r>
-          </a:p>
-          <a:p>
-            <a:pPr lvl="0"/>
-            <a:r>
-              <a:rPr/>
-              <a:t>Il propose un certain nombre de ressources pour ce type de projet.</a:t>
-            </a:r>
-          </a:p>
-          <a:p>
-            <a:pPr lvl="0"/>
+              <a:t>Marguerittes (Gard) </a:t>
+            </a:r>
             <a:r>
               <a:rPr>
                 <a:hlinkClick r:id="rId2"/>
               </a:rPr>
-              <a:t>caue-occitanie :</a:t>
-            </a:r>
-            <a:r>
-              <a:rPr/>
-              <a:t> dossier permis de végétaliser</a:t>
+              <a:t>(site)</a:t>
+            </a:r>
+          </a:p>
+          <a:p>
+            <a:pPr lvl="0"/>
+            <a:r>
+              <a:rPr/>
+              <a:t>Végétaliser Banyuls, c’est permis ! </a:t>
+            </a:r>
+            <a:r>
+              <a:rPr>
+                <a:hlinkClick r:id="rId3"/>
+              </a:rPr>
+              <a:t>(site)</a:t>
+            </a:r>
+          </a:p>
+          <a:p>
+            <a:pPr lvl="0"/>
+            <a:r>
+              <a:rPr/>
+              <a:t>Saint-Nazaire-d’Aude : La commune fournit un « Kit de plantation » complet (plante locale, paillage, terreau et tuteur de protection) dès que la fosse est créée par la mairie. </a:t>
+            </a:r>
+            <a:r>
+              <a:rPr>
+                <a:hlinkClick r:id="rId4"/>
+              </a:rPr>
+              <a:t>(site)</a:t>
             </a:r>
           </a:p>
         </p:txBody>
@@ -4775,7 +4805,7 @@
             </a:pPr>
             <a:r>
               <a:rPr/>
-              <a:t>Un partenariat simple entre la commune et les riverains</a:t>
+              <a:t>Organismes officiels d’accompagnement</a:t>
             </a:r>
           </a:p>
         </p:txBody>
@@ -4795,40 +4825,30 @@
           <a:bodyPr/>
           <a:lstStyle/>
           <a:p>
-            <a:pPr lvl="0" indent="0" marL="0">
-              <a:buNone/>
-            </a:pPr>
-            <a:r>
-              <a:rPr b="1"/>
-              <a:t>Un dispositif communal de végétalisation des façades</a:t>
-            </a:r>
-          </a:p>
-          <a:p>
-            <a:pPr lvl="0"/>
-            <a:r>
-              <a:rPr/>
-              <a:t>Aide de la mairie pour la mise en place de fosses sur le domaine public.</a:t>
-            </a:r>
-          </a:p>
-          <a:p>
-            <a:pPr lvl="0"/>
-            <a:r>
-              <a:rPr/>
-              <a:t>Conseil technique sur le choix de la plante.</a:t>
-            </a:r>
-          </a:p>
-          <a:p>
-            <a:pPr lvl="0"/>
-            <a:r>
-              <a:rPr/>
-              <a:t>Éventuellement, fourniture du végétal à planter.</a:t>
-            </a:r>
-          </a:p>
-          <a:p>
-            <a:pPr lvl="0"/>
-            <a:r>
-              <a:rPr/>
-              <a:t>Engagement écrit du riverain pour l’entretien, la taille et l’arrosage.</a:t>
+            <a:pPr lvl="0"/>
+            <a:r>
+              <a:rPr/>
+              <a:t>Le CAUE 82 (Conseil d’Architecture, d’Urbanisme et de l’Environnement) est un organisme investi d’une mission d’intérêt public.</a:t>
+            </a:r>
+          </a:p>
+          <a:p>
+            <a:pPr lvl="0"/>
+            <a:r>
+              <a:rPr/>
+              <a:t>Il propose un certain nombre de ressources pour ce type de projet.</a:t>
+            </a:r>
+          </a:p>
+          <a:p>
+            <a:pPr lvl="0"/>
+            <a:r>
+              <a:rPr>
+                <a:hlinkClick r:id="rId2"/>
+              </a:rPr>
+              <a:t>caue-occitanie :</a:t>
+            </a:r>
+            <a:r>
+              <a:rPr/>
+              <a:t> dossier permis de végétaliser</a:t>
             </a:r>
           </a:p>
         </p:txBody>
@@ -4875,7 +4895,7 @@
             </a:pPr>
             <a:r>
               <a:rPr/>
-              <a:t>Faire connaître le projet</a:t>
+              <a:t>Un partenariat simple entre la commune et les riverains</a:t>
             </a:r>
           </a:p>
         </p:txBody>
@@ -4900,42 +4920,35 @@
             </a:pPr>
             <a:r>
               <a:rPr b="1"/>
-              <a:t>Communication municipale</a:t>
-            </a:r>
-          </a:p>
-          <a:p>
-            <a:pPr lvl="0"/>
-            <a:r>
-              <a:rPr/>
-              <a:t>Affichage en mairie, sur panneaux.</a:t>
-            </a:r>
-          </a:p>
-          <a:p>
-            <a:pPr lvl="0"/>
-            <a:r>
-              <a:rPr/>
-              <a:t>Page dans IntraMuros</a:t>
-            </a:r>
-          </a:p>
-          <a:p>
-            <a:pPr lvl="0"/>
-            <a:r>
-              <a:rPr/>
-              <a:t>Réunion publique de démarrage.</a:t>
-            </a:r>
-          </a:p>
-          <a:p>
-            <a:pPr lvl="0"/>
-            <a:r>
-              <a:rPr/>
-              <a:t>Publication dans bulletin, avec convention à remplir en janvier.</a:t>
-            </a:r>
-          </a:p>
-          <a:p>
-            <a:pPr lvl="0"/>
-            <a:r>
-              <a:rPr/>
-              <a:t>Premier bilan dans bulletin en juillet.</a:t>
+              <a:t>Un dispositif communal de végétalisation des façades</a:t>
+            </a:r>
+          </a:p>
+          <a:p>
+            <a:pPr lvl="0"/>
+            <a:r>
+              <a:rPr/>
+              <a:t>Aide de la mairie pour la mise en place de fosses sur le domaine public.</a:t>
+            </a:r>
+          </a:p>
+          <a:p>
+            <a:pPr lvl="0"/>
+            <a:r>
+              <a:rPr/>
+              <a:t>Conseil technique sur le choix de la plante.</a:t>
+            </a:r>
+          </a:p>
+          <a:p>
+            <a:pPr lvl="0"/>
+            <a:r>
+              <a:rPr/>
+              <a:t>Éventuellement, fourniture du végétal à planter.</a:t>
+            </a:r>
+          </a:p>
+          <a:p>
+            <a:pPr lvl="0"/>
+            <a:r>
+              <a:rPr/>
+              <a:t>Engagement écrit du riverain pour l’entretien, la taille et l’arrosage.</a:t>
             </a:r>
           </a:p>
         </p:txBody>
@@ -4982,69 +4995,67 @@
             </a:pPr>
             <a:r>
               <a:rPr/>
-              <a:t>Fosse de plantation pour pied de vigne en bordure de rue</a:t>
-            </a:r>
-          </a:p>
-        </p:txBody>
-      </p:sp>
-      <p:pic>
-        <p:nvPicPr>
-          <p:cNvPr descr="images/fosse.jpg" id="0" name="Picture 1"/>
-          <p:cNvPicPr>
-            <a:picLocks noGrp="1" noChangeAspect="1"/>
-          </p:cNvPicPr>
-          <p:nvPr/>
-        </p:nvPicPr>
-        <p:blipFill>
-          <a:blip r:embed="rId2"/>
-          <a:stretch>
-            <a:fillRect/>
-          </a:stretch>
-        </p:blipFill>
-        <p:spPr bwMode="auto">
-          <a:xfrm>
-            <a:off x="2654300" y="1193800"/>
-            <a:ext cx="3835400" cy="2882900"/>
-          </a:xfrm>
-          <a:prstGeom prst="rect">
-            <a:avLst/>
-          </a:prstGeom>
-          <a:noFill/>
-          <a:ln w="9525">
-            <a:noFill/>
-            <a:headEnd/>
-            <a:tailEnd/>
-          </a:ln>
-        </p:spPr>
-      </p:pic>
-      <p:sp>
-        <p:nvSpPr>
-          <p:cNvPr id="1" name="TextBox 3"/>
-          <p:cNvSpPr txBox="1"/>
+              <a:t>Faire connaître le projet</a:t>
+            </a:r>
+          </a:p>
+        </p:txBody>
+      </p:sp>
+      <p:sp>
+        <p:nvSpPr>
+          <p:cNvPr id="3" name="Content Placeholder 2"/>
+          <p:cNvSpPr>
+            <a:spLocks noGrp="1"/>
+          </p:cNvSpPr>
           <p:nvPr>
             <p:ph idx="1"/>
           </p:nvPr>
         </p:nvSpPr>
-        <p:spPr>
-          <a:xfrm>
-            <a:off x="457200" y="4076700"/>
-            <a:ext cx="8229600" cy="508000"/>
-          </a:xfrm>
-          <a:prstGeom prst="rect">
-            <a:avLst/>
-          </a:prstGeom>
-          <a:noFill/>
-        </p:spPr>
-        <p:txBody>
-          <a:bodyPr/>
-          <a:lstStyle/>
-          <a:p>
-            <a:pPr lvl="0" indent="0" marL="0" algn="ctr">
+        <p:spPr/>
+        <p:txBody>
+          <a:bodyPr/>
+          <a:lstStyle/>
+          <a:p>
+            <a:pPr lvl="0" indent="0" marL="0">
               <a:buNone/>
             </a:pPr>
             <a:r>
-              <a:rPr/>
-              <a:t>Fosse: réalisation</a:t>
+              <a:rPr b="1"/>
+              <a:t>Communication municipale</a:t>
+            </a:r>
+          </a:p>
+          <a:p>
+            <a:pPr lvl="0"/>
+            <a:r>
+              <a:rPr/>
+              <a:t>Affichage en mairie, sur panneaux.</a:t>
+            </a:r>
+          </a:p>
+          <a:p>
+            <a:pPr lvl="0"/>
+            <a:r>
+              <a:rPr/>
+              <a:t>Page dans IntraMuros</a:t>
+            </a:r>
+          </a:p>
+          <a:p>
+            <a:pPr lvl="0"/>
+            <a:r>
+              <a:rPr/>
+              <a:t>Réunion publique de démarrage.</a:t>
+            </a:r>
+          </a:p>
+          <a:p>
+            <a:pPr lvl="0"/>
+            <a:r>
+              <a:rPr/>
+              <a:t>Publication dans bulletin, avec convention à remplir en janvier.</a:t>
+            </a:r>
+          </a:p>
+          <a:p>
+            <a:pPr lvl="0"/>
+            <a:r>
+              <a:rPr/>
+              <a:t>Premier bilan dans bulletin en juillet.</a:t>
             </a:r>
           </a:p>
         </p:txBody>

--- a/presentation.pptx
+++ b/presentation.pptx
@@ -3135,31 +3135,100 @@
           </a:p>
         </p:txBody>
       </p:sp>
-      <p:sp>
-        <p:nvSpPr>
-          <p:cNvPr id="3" name="Content Placeholder 2"/>
-          <p:cNvSpPr>
-            <a:spLocks noGrp="1"/>
-          </p:cNvSpPr>
+      <p:graphicFrame>
+        <p:nvGraphicFramePr>
+          <p:cNvPr id="6" name="Content Placeholder 5"/>
+          <p:cNvGraphicFramePr>
+            <a:graphicFrameLocks noGrp="1"/>
+          </p:cNvGraphicFramePr>
           <p:nvPr>
             <p:ph idx="1"/>
           </p:nvPr>
-        </p:nvSpPr>
-        <p:spPr/>
-        <p:txBody>
-          <a:bodyPr/>
-          <a:lstStyle/>
-          <a:p>
-            <a:pPr lvl="0" indent="0" marL="0">
-              <a:buNone/>
-            </a:pPr>
-            <a:r>
-              <a:rPr/>
-              <a:t> </a:t>
-            </a:r>
-          </a:p>
-        </p:txBody>
-      </p:sp>
+        </p:nvGraphicFramePr>
+        <p:xfrm>
+          <a:off x="457200" y="1193800"/>
+          <a:ext cx="8229600" cy="3390900"/>
+        </p:xfrm>
+        <a:graphic>
+          <a:graphicData uri="http://schemas.openxmlformats.org/drawingml/2006/table">
+            <a:tbl>
+              <a:tblPr firstRow="1" bandRow="1">
+                <a:tableStyleId>{5C22544A-7EE6-4342-B048-85BDC9FD1C3A}</a:tableStyleId>
+              </a:tblPr>
+              <a:tblGrid>
+                <a:gridCol w="4114800"/>
+                <a:gridCol w="4114800"/>
+              </a:tblGrid>
+              <a:tr h="0">
+                <a:tc>
+                  <a:txBody>
+                    <a:bodyPr/>
+                    <a:lstStyle/>
+                    <a:p>
+                      <a:pPr lvl="0" indent="0" marL="0" algn="ctr">
+                        <a:buNone/>
+                      </a:pPr>
+                      <a:r>
+                        <a:rPr/>
+                        <a:t>Image gauche</a:t>
+                      </a:r>
+                    </a:p>
+                  </a:txBody>
+                  <a:tcPr/>
+                </a:tc>
+                <a:tc>
+                  <a:txBody>
+                    <a:bodyPr/>
+                    <a:lstStyle/>
+                    <a:p>
+                      <a:pPr lvl="0" indent="0" marL="0" algn="ctr">
+                        <a:buNone/>
+                      </a:pPr>
+                      <a:r>
+                        <a:rPr/>
+                        <a:t>Image droite</a:t>
+                      </a:r>
+                    </a:p>
+                  </a:txBody>
+                  <a:tcPr/>
+                </a:tc>
+              </a:tr>
+              <a:tr h="0">
+                <a:tc>
+                  <a:txBody>
+                    <a:bodyPr/>
+                    <a:lstStyle/>
+                    <a:p>
+                      <a:pPr lvl="0" indent="0" marL="0" algn="ctr">
+                        <a:buNone/>
+                      </a:pPr>
+                      <a:r>
+                        <a:rPr/>
+                        <a:t>Alt 1</a:t>
+                      </a:r>
+                    </a:p>
+                  </a:txBody>
+                </a:tc>
+                <a:tc>
+                  <a:txBody>
+                    <a:bodyPr/>
+                    <a:lstStyle/>
+                    <a:p>
+                      <a:pPr lvl="0" indent="0" marL="0" algn="ctr">
+                        <a:buNone/>
+                      </a:pPr>
+                      <a:r>
+                        <a:rPr/>
+                        <a:t>Alt 2</a:t>
+                      </a:r>
+                    </a:p>
+                  </a:txBody>
+                </a:tc>
+              </a:tr>
+            </a:tbl>
+          </a:graphicData>
+        </a:graphic>
+      </p:graphicFrame>
     </p:spTree>
   </p:cSld>
 </p:sld>

--- a/presentation.pptx
+++ b/presentation.pptx
@@ -3170,7 +3170,7 @@
                       </a:pPr>
                       <a:r>
                         <a:rPr/>
-                        <a:t>Image gauche</a:t>
+                        <a:t>Avant</a:t>
                       </a:r>
                     </a:p>
                   </a:txBody>
@@ -3186,7 +3186,7 @@
                       </a:pPr>
                       <a:r>
                         <a:rPr/>
-                        <a:t>Image droite</a:t>
+                        <a:t>Après</a:t>
                       </a:r>
                     </a:p>
                   </a:txBody>
@@ -3203,7 +3203,9 @@
                         <a:buNone/>
                       </a:pPr>
                       <a:r>
-                        <a:rPr/>
+                        <a:rPr>
+                          <a:hlinkClick r:id="rId2"/>
+                        </a:rPr>
                         <a:t>Alt 1</a:t>
                       </a:r>
                     </a:p>
@@ -3218,7 +3220,9 @@
                         <a:buNone/>
                       </a:pPr>
                       <a:r>
-                        <a:rPr/>
+                        <a:rPr>
+                          <a:hlinkClick r:id="rId3"/>
+                        </a:rPr>
                         <a:t>Alt 2</a:t>
                       </a:r>
                     </a:p>

--- a/presentation.pptx
+++ b/presentation.pptx
@@ -3203,9 +3203,7 @@
                         <a:buNone/>
                       </a:pPr>
                       <a:r>
-                        <a:rPr>
-                          <a:hlinkClick r:id="rId2"/>
-                        </a:rPr>
+                        <a:rPr/>
                         <a:t>Alt 1</a:t>
                       </a:r>
                     </a:p>
@@ -3220,9 +3218,7 @@
                         <a:buNone/>
                       </a:pPr>
                       <a:r>
-                        <a:rPr>
-                          <a:hlinkClick r:id="rId3"/>
-                        </a:rPr>
+                        <a:rPr/>
                         <a:t>Alt 2</a:t>
                       </a:r>
                     </a:p>

--- a/presentation.pptx
+++ b/presentation.pptx
@@ -3135,100 +3135,68 @@
           </a:p>
         </p:txBody>
       </p:sp>
-      <p:graphicFrame>
-        <p:nvGraphicFramePr>
-          <p:cNvPr id="6" name="Content Placeholder 5"/>
-          <p:cNvGraphicFramePr>
-            <a:graphicFrameLocks noGrp="1"/>
-          </p:cNvGraphicFramePr>
+      <p:pic>
+        <p:nvPicPr>
+          <p:cNvPr descr="images/rue_0_s.jpg" id="0" name="Picture 1"/>
+          <p:cNvPicPr>
+            <a:picLocks noGrp="1" noChangeAspect="1"/>
+          </p:cNvPicPr>
+          <p:nvPr/>
+        </p:nvPicPr>
+        <p:blipFill>
+          <a:blip r:embed="rId2"/>
+          <a:stretch>
+            <a:fillRect/>
+          </a:stretch>
+        </p:blipFill>
+        <p:spPr bwMode="auto">
+          <a:xfrm>
+            <a:off x="2425700" y="1193800"/>
+            <a:ext cx="4305300" cy="2882900"/>
+          </a:xfrm>
+          <a:prstGeom prst="rect">
+            <a:avLst/>
+          </a:prstGeom>
+          <a:noFill/>
+          <a:ln w="9525">
+            <a:noFill/>
+            <a:headEnd/>
+            <a:tailEnd/>
+          </a:ln>
+        </p:spPr>
+      </p:pic>
+      <p:sp>
+        <p:nvSpPr>
+          <p:cNvPr id="1" name="TextBox 3"/>
+          <p:cNvSpPr txBox="1"/>
           <p:nvPr>
             <p:ph idx="1"/>
           </p:nvPr>
-        </p:nvGraphicFramePr>
-        <p:xfrm>
-          <a:off x="457200" y="1193800"/>
-          <a:ext cx="8229600" cy="3390900"/>
-        </p:xfrm>
-        <a:graphic>
-          <a:graphicData uri="http://schemas.openxmlformats.org/drawingml/2006/table">
-            <a:tbl>
-              <a:tblPr firstRow="1" bandRow="1">
-                <a:tableStyleId>{5C22544A-7EE6-4342-B048-85BDC9FD1C3A}</a:tableStyleId>
-              </a:tblPr>
-              <a:tblGrid>
-                <a:gridCol w="4114800"/>
-                <a:gridCol w="4114800"/>
-              </a:tblGrid>
-              <a:tr h="0">
-                <a:tc>
-                  <a:txBody>
-                    <a:bodyPr/>
-                    <a:lstStyle/>
-                    <a:p>
-                      <a:pPr lvl="0" indent="0" marL="0" algn="ctr">
-                        <a:buNone/>
-                      </a:pPr>
-                      <a:r>
-                        <a:rPr/>
-                        <a:t>Avant</a:t>
-                      </a:r>
-                    </a:p>
-                  </a:txBody>
-                  <a:tcPr/>
-                </a:tc>
-                <a:tc>
-                  <a:txBody>
-                    <a:bodyPr/>
-                    <a:lstStyle/>
-                    <a:p>
-                      <a:pPr lvl="0" indent="0" marL="0" algn="ctr">
-                        <a:buNone/>
-                      </a:pPr>
-                      <a:r>
-                        <a:rPr/>
-                        <a:t>Après</a:t>
-                      </a:r>
-                    </a:p>
-                  </a:txBody>
-                  <a:tcPr/>
-                </a:tc>
-              </a:tr>
-              <a:tr h="0">
-                <a:tc>
-                  <a:txBody>
-                    <a:bodyPr/>
-                    <a:lstStyle/>
-                    <a:p>
-                      <a:pPr lvl="0" indent="0" marL="0" algn="ctr">
-                        <a:buNone/>
-                      </a:pPr>
-                      <a:r>
-                        <a:rPr/>
-                        <a:t>Alt 1</a:t>
-                      </a:r>
-                    </a:p>
-                  </a:txBody>
-                </a:tc>
-                <a:tc>
-                  <a:txBody>
-                    <a:bodyPr/>
-                    <a:lstStyle/>
-                    <a:p>
-                      <a:pPr lvl="0" indent="0" marL="0" algn="ctr">
-                        <a:buNone/>
-                      </a:pPr>
-                      <a:r>
-                        <a:rPr/>
-                        <a:t>Alt 2</a:t>
-                      </a:r>
-                    </a:p>
-                  </a:txBody>
-                </a:tc>
-              </a:tr>
-            </a:tbl>
-          </a:graphicData>
-        </a:graphic>
-      </p:graphicFrame>
+        </p:nvSpPr>
+        <p:spPr>
+          <a:xfrm>
+            <a:off x="457200" y="4076700"/>
+            <a:ext cx="8229600" cy="508000"/>
+          </a:xfrm>
+          <a:prstGeom prst="rect">
+            <a:avLst/>
+          </a:prstGeom>
+          <a:noFill/>
+        </p:spPr>
+        <p:txBody>
+          <a:bodyPr/>
+          <a:lstStyle/>
+          <a:p>
+            <a:pPr lvl="0" indent="0" marL="0" algn="ctr">
+              <a:buNone/>
+            </a:pPr>
+            <a:r>
+              <a:rPr/>
+              <a:t>Avant / Après</a:t>
+            </a:r>
+          </a:p>
+        </p:txBody>
+      </p:sp>
     </p:spTree>
   </p:cSld>
 </p:sld>

--- a/presentation.pptx
+++ b/presentation.pptx
@@ -3137,7 +3137,7 @@
       </p:sp>
       <p:pic>
         <p:nvPicPr>
-          <p:cNvPr descr="images/rue_0_s.png" id="0" name="Picture 1"/>
+          <p:cNvPr descr="images/rue_5_s.png" id="0" name="Picture 1"/>
           <p:cNvPicPr>
             <a:picLocks noGrp="1" noChangeAspect="1"/>
           </p:cNvPicPr>
@@ -3151,8 +3151,8 @@
         </p:blipFill>
         <p:spPr bwMode="auto">
           <a:xfrm>
-            <a:off x="2425700" y="1193800"/>
-            <a:ext cx="4305300" cy="2882900"/>
+            <a:off x="3581400" y="1193800"/>
+            <a:ext cx="1981200" cy="2882900"/>
           </a:xfrm>
           <a:prstGeom prst="rect">
             <a:avLst/>
@@ -4250,7 +4250,7 @@
       </p:sp>
       <p:pic>
         <p:nvPicPr>
-          <p:cNvPr descr="images/rue_2_s.jpg" id="0" name="Picture 1"/>
+          <p:cNvPr descr="images/rue_4_s.jpg" id="0" name="Picture 1"/>
           <p:cNvPicPr>
             <a:picLocks noGrp="1" noChangeAspect="1"/>
           </p:cNvPicPr>
@@ -4264,8 +4264,8 @@
         </p:blipFill>
         <p:spPr bwMode="auto">
           <a:xfrm>
-            <a:off x="2349500" y="1193800"/>
-            <a:ext cx="4445000" cy="2882900"/>
+            <a:off x="2311400" y="1193800"/>
+            <a:ext cx="4533900" cy="2882900"/>
           </a:xfrm>
           <a:prstGeom prst="rect">
             <a:avLst/>
@@ -4642,7 +4642,7 @@
       </p:sp>
       <p:pic>
         <p:nvPicPr>
-          <p:cNvPr descr="images/rue_1_s.jpg" id="0" name="Picture 1"/>
+          <p:cNvPr descr="images/rue_3_s.jpg" id="0" name="Picture 1"/>
           <p:cNvPicPr>
             <a:picLocks noGrp="1" noChangeAspect="1"/>
           </p:cNvPicPr>
@@ -4656,8 +4656,8 @@
         </p:blipFill>
         <p:spPr bwMode="auto">
           <a:xfrm>
-            <a:off x="2336800" y="1193800"/>
-            <a:ext cx="4470400" cy="2882900"/>
+            <a:off x="3581400" y="1193800"/>
+            <a:ext cx="1993900" cy="2882900"/>
           </a:xfrm>
           <a:prstGeom prst="rect">
             <a:avLst/>

--- a/presentation.pptx
+++ b/presentation.pptx
@@ -25,7 +25,6 @@
     <p:sldId id="273" r:id="rId19"/>
     <p:sldId id="274" r:id="rId20"/>
     <p:sldId id="275" r:id="rId21"/>
-    <p:sldId id="276" r:id="rId22"/>
   </p:sldIdLst>
   <p:sldSz cx="9144000" cy="5143500" type="screen16x9"/>
   <p:notesSz cx="6858000" cy="9144000"/>
@@ -3239,6 +3238,1754 @@
             </a:pPr>
             <a:r>
               <a:rPr/>
+              <a:t>Un parcours simple et rapide, compréhensible par tous</a:t>
+            </a:r>
+          </a:p>
+        </p:txBody>
+      </p:sp>
+      <p:sp>
+        <p:nvSpPr>
+          <p:cNvPr id="3" name="Content Placeholder 2"/>
+          <p:cNvSpPr>
+            <a:spLocks noGrp="1"/>
+          </p:cNvSpPr>
+          <p:nvPr>
+            <p:ph idx="1"/>
+          </p:nvPr>
+        </p:nvSpPr>
+        <p:spPr/>
+        <p:txBody>
+          <a:bodyPr/>
+          <a:lstStyle/>
+          <a:p>
+            <a:pPr lvl="0"/>
+            <a:r>
+              <a:rPr/>
+              <a:t>Le participant signe une convention (en ligne ou sur papier).</a:t>
+            </a:r>
+          </a:p>
+          <a:p>
+            <a:pPr lvl="0"/>
+            <a:r>
+              <a:rPr/>
+              <a:t>Un rendez-vous est pris avec un représentant de la mairie : les positions des fosses sont marquées à la bombe sur le trottoir, en fonction des contraintes et du végétal visé.</a:t>
+            </a:r>
+          </a:p>
+          <a:p>
+            <a:pPr lvl="0"/>
+            <a:r>
+              <a:rPr/>
+              <a:t>Les services municipaux mettent en place les fosses et plantent éventuellement les végétaux choisis.</a:t>
+            </a:r>
+          </a:p>
+        </p:txBody>
+      </p:sp>
+    </p:spTree>
+  </p:cSld>
+</p:sld>
+</file>
+
+<file path=ppt/slides/slide11.xml><?xml version="1.0" encoding="utf-8"?>
+<p:sld xmlns:a="http://schemas.openxmlformats.org/drawingml/2006/main" xmlns:r="http://schemas.openxmlformats.org/officeDocument/2006/relationships" xmlns:p="http://schemas.openxmlformats.org/presentationml/2006/main">
+  <p:cSld>
+    <p:spTree>
+      <p:nvGrpSpPr>
+        <p:cNvPr id="1" name=""/>
+        <p:cNvGrpSpPr/>
+        <p:nvPr/>
+      </p:nvGrpSpPr>
+      <p:grpSpPr>
+        <a:xfrm>
+          <a:off x="0" y="0"/>
+          <a:ext cx="0" cy="0"/>
+          <a:chOff x="0" y="0"/>
+          <a:chExt cx="0" cy="0"/>
+        </a:xfrm>
+      </p:grpSpPr>
+      <p:sp>
+        <p:nvSpPr>
+          <p:cNvPr id="2" name="Title 1"/>
+          <p:cNvSpPr>
+            <a:spLocks noGrp="1"/>
+          </p:cNvSpPr>
+          <p:nvPr>
+            <p:ph type="title"/>
+          </p:nvPr>
+        </p:nvSpPr>
+        <p:spPr/>
+        <p:txBody>
+          <a:bodyPr/>
+          <a:lstStyle/>
+          <a:p>
+            <a:pPr lvl="0" indent="0" marL="0">
+              <a:buNone/>
+            </a:pPr>
+            <a:r>
+              <a:rPr/>
+              <a:t>La « convention » avec les riverains</a:t>
+            </a:r>
+          </a:p>
+        </p:txBody>
+      </p:sp>
+      <p:sp>
+        <p:nvSpPr>
+          <p:cNvPr id="3" name="Content Placeholder 2"/>
+          <p:cNvSpPr>
+            <a:spLocks noGrp="1"/>
+          </p:cNvSpPr>
+          <p:nvPr>
+            <p:ph idx="1"/>
+          </p:nvPr>
+        </p:nvSpPr>
+        <p:spPr/>
+        <p:txBody>
+          <a:bodyPr/>
+          <a:lstStyle/>
+          <a:p>
+            <a:pPr lvl="0" indent="0" marL="0">
+              <a:buNone/>
+            </a:pPr>
+            <a:r>
+              <a:rPr/>
+              <a:t>Une convention décrit formalisée et simple les engagements de la mairie et des riverains. </a:t>
+            </a:r>
+            <a:r>
+              <a:rPr>
+                <a:hlinkClick r:id="rId2"/>
+              </a:rPr>
+              <a:t>convention</a:t>
+            </a:r>
+          </a:p>
+        </p:txBody>
+      </p:sp>
+    </p:spTree>
+  </p:cSld>
+</p:sld>
+</file>
+
+<file path=ppt/slides/slide12.xml><?xml version="1.0" encoding="utf-8"?>
+<p:sld xmlns:a="http://schemas.openxmlformats.org/drawingml/2006/main" xmlns:r="http://schemas.openxmlformats.org/officeDocument/2006/relationships" xmlns:p="http://schemas.openxmlformats.org/presentationml/2006/main">
+  <p:cSld>
+    <p:spTree>
+      <p:nvGrpSpPr>
+        <p:cNvPr id="1" name=""/>
+        <p:cNvGrpSpPr/>
+        <p:nvPr/>
+      </p:nvGrpSpPr>
+      <p:grpSpPr>
+        <a:xfrm>
+          <a:off x="0" y="0"/>
+          <a:ext cx="0" cy="0"/>
+          <a:chOff x="0" y="0"/>
+          <a:chExt cx="0" cy="0"/>
+        </a:xfrm>
+      </p:grpSpPr>
+      <p:sp>
+        <p:nvSpPr>
+          <p:cNvPr id="2" name="Title 1"/>
+          <p:cNvSpPr>
+            <a:spLocks noGrp="1"/>
+          </p:cNvSpPr>
+          <p:nvPr>
+            <p:ph type="title"/>
+          </p:nvPr>
+        </p:nvSpPr>
+        <p:spPr/>
+        <p:txBody>
+          <a:bodyPr/>
+          <a:lstStyle/>
+          <a:p>
+            <a:pPr lvl="0" indent="0" marL="0">
+              <a:buNone/>
+            </a:pPr>
+            <a:r>
+              <a:rPr/>
+              <a:t>Développement de la végétation en pied de façade</a:t>
+            </a:r>
+          </a:p>
+        </p:txBody>
+      </p:sp>
+      <p:pic>
+        <p:nvPicPr>
+          <p:cNvPr descr="images/fosse2.jpg" id="0" name="Picture 1"/>
+          <p:cNvPicPr>
+            <a:picLocks noGrp="1" noChangeAspect="1"/>
+          </p:cNvPicPr>
+          <p:nvPr/>
+        </p:nvPicPr>
+        <p:blipFill>
+          <a:blip r:embed="rId2"/>
+          <a:stretch>
+            <a:fillRect/>
+          </a:stretch>
+        </p:blipFill>
+        <p:spPr bwMode="auto">
+          <a:xfrm>
+            <a:off x="3784600" y="1193800"/>
+            <a:ext cx="1562100" cy="2882900"/>
+          </a:xfrm>
+          <a:prstGeom prst="rect">
+            <a:avLst/>
+          </a:prstGeom>
+          <a:noFill/>
+          <a:ln w="9525">
+            <a:noFill/>
+            <a:headEnd/>
+            <a:tailEnd/>
+          </a:ln>
+        </p:spPr>
+      </p:pic>
+      <p:sp>
+        <p:nvSpPr>
+          <p:cNvPr id="1" name="TextBox 3"/>
+          <p:cNvSpPr txBox="1"/>
+          <p:nvPr>
+            <p:ph idx="1"/>
+          </p:nvPr>
+        </p:nvSpPr>
+        <p:spPr>
+          <a:xfrm>
+            <a:off x="457200" y="4076700"/>
+            <a:ext cx="8229600" cy="508000"/>
+          </a:xfrm>
+          <a:prstGeom prst="rect">
+            <a:avLst/>
+          </a:prstGeom>
+          <a:noFill/>
+        </p:spPr>
+        <p:txBody>
+          <a:bodyPr/>
+          <a:lstStyle/>
+          <a:p>
+            <a:pPr lvl="0" indent="0" marL="0" algn="ctr">
+              <a:buNone/>
+            </a:pPr>
+            <a:r>
+              <a:rPr/>
+              <a:t>fosse</a:t>
+            </a:r>
+          </a:p>
+        </p:txBody>
+      </p:sp>
+    </p:spTree>
+  </p:cSld>
+</p:sld>
+</file>
+
+<file path=ppt/slides/slide13.xml><?xml version="1.0" encoding="utf-8"?>
+<p:sld xmlns:a="http://schemas.openxmlformats.org/drawingml/2006/main" xmlns:r="http://schemas.openxmlformats.org/officeDocument/2006/relationships" xmlns:p="http://schemas.openxmlformats.org/presentationml/2006/main">
+  <p:cSld>
+    <p:spTree>
+      <p:nvGrpSpPr>
+        <p:cNvPr id="1" name=""/>
+        <p:cNvGrpSpPr/>
+        <p:nvPr/>
+      </p:nvGrpSpPr>
+      <p:grpSpPr>
+        <a:xfrm>
+          <a:off x="0" y="0"/>
+          <a:ext cx="0" cy="0"/>
+          <a:chOff x="0" y="0"/>
+          <a:chExt cx="0" cy="0"/>
+        </a:xfrm>
+      </p:grpSpPr>
+      <p:sp>
+        <p:nvSpPr>
+          <p:cNvPr id="2" name="Title 1"/>
+          <p:cNvSpPr>
+            <a:spLocks noGrp="1"/>
+          </p:cNvSpPr>
+          <p:nvPr>
+            <p:ph type="title"/>
+          </p:nvPr>
+        </p:nvSpPr>
+        <p:spPr/>
+        <p:txBody>
+          <a:bodyPr/>
+          <a:lstStyle/>
+          <a:p>
+            <a:pPr lvl="0" indent="0" marL="0">
+              <a:buNone/>
+            </a:pPr>
+            <a:r>
+              <a:rPr/>
+              <a:t>Risques juridiques et points de vigilance</a:t>
+            </a:r>
+          </a:p>
+        </p:txBody>
+      </p:sp>
+      <p:sp>
+        <p:nvSpPr>
+          <p:cNvPr id="3" name="Content Placeholder 2"/>
+          <p:cNvSpPr>
+            <a:spLocks noGrp="1"/>
+          </p:cNvSpPr>
+          <p:nvPr>
+            <p:ph idx="1"/>
+          </p:nvPr>
+        </p:nvSpPr>
+        <p:spPr/>
+        <p:txBody>
+          <a:bodyPr/>
+          <a:lstStyle/>
+          <a:p>
+            <a:pPr lvl="0" indent="0" marL="0">
+              <a:buNone/>
+            </a:pPr>
+            <a:r>
+              <a:rPr b="1"/>
+              <a:t>Les travaux doivent être facilement réversibles</a:t>
+            </a:r>
+          </a:p>
+          <a:p>
+            <a:pPr lvl="0"/>
+            <a:r>
+              <a:rPr/>
+              <a:t>Sécurité des piétons et de la circulation.</a:t>
+            </a:r>
+          </a:p>
+          <a:p>
+            <a:pPr lvl="0"/>
+            <a:r>
+              <a:rPr/>
+              <a:t>Réseaux enterrés et contraintes techniques.</a:t>
+            </a:r>
+          </a:p>
+          <a:p>
+            <a:pPr lvl="0"/>
+            <a:r>
+              <a:rPr/>
+              <a:t>Remplacement éventuel des végétaux.</a:t>
+            </a:r>
+          </a:p>
+          <a:p>
+            <a:pPr lvl="0"/>
+            <a:r>
+              <a:rPr/>
+              <a:t>Risques de non-respect des engagements du riverain.</a:t>
+            </a:r>
+          </a:p>
+        </p:txBody>
+      </p:sp>
+    </p:spTree>
+  </p:cSld>
+</p:sld>
+</file>
+
+<file path=ppt/slides/slide14.xml><?xml version="1.0" encoding="utf-8"?>
+<p:sld xmlns:a="http://schemas.openxmlformats.org/drawingml/2006/main" xmlns:r="http://schemas.openxmlformats.org/officeDocument/2006/relationships" xmlns:p="http://schemas.openxmlformats.org/presentationml/2006/main">
+  <p:cSld>
+    <p:spTree>
+      <p:nvGrpSpPr>
+        <p:cNvPr id="1" name=""/>
+        <p:cNvGrpSpPr/>
+        <p:nvPr/>
+      </p:nvGrpSpPr>
+      <p:grpSpPr>
+        <a:xfrm>
+          <a:off x="0" y="0"/>
+          <a:ext cx="0" cy="0"/>
+          <a:chOff x="0" y="0"/>
+          <a:chExt cx="0" cy="0"/>
+        </a:xfrm>
+      </p:grpSpPr>
+      <p:sp>
+        <p:nvSpPr>
+          <p:cNvPr id="2" name="Title 1"/>
+          <p:cNvSpPr>
+            <a:spLocks noGrp="1"/>
+          </p:cNvSpPr>
+          <p:nvPr>
+            <p:ph type="title"/>
+          </p:nvPr>
+        </p:nvSpPr>
+        <p:spPr/>
+        <p:txBody>
+          <a:bodyPr/>
+          <a:lstStyle/>
+          <a:p>
+            <a:pPr lvl="0" indent="0" marL="0">
+              <a:buNone/>
+            </a:pPr>
+            <a:r>
+              <a:rPr/>
+              <a:t>Coût pris en charge par la mairie</a:t>
+            </a:r>
+          </a:p>
+        </p:txBody>
+      </p:sp>
+      <p:sp>
+        <p:nvSpPr>
+          <p:cNvPr id="3" name="Content Placeholder 2"/>
+          <p:cNvSpPr>
+            <a:spLocks noGrp="1"/>
+          </p:cNvSpPr>
+          <p:nvPr>
+            <p:ph idx="1"/>
+          </p:nvPr>
+        </p:nvSpPr>
+        <p:spPr/>
+        <p:txBody>
+          <a:bodyPr/>
+          <a:lstStyle/>
+          <a:p>
+            <a:pPr lvl="0" indent="0" marL="0">
+              <a:buNone/>
+            </a:pPr>
+            <a:r>
+              <a:rPr b="1"/>
+              <a:t>Un investissement ciblé et maîtrisé</a:t>
+            </a:r>
+          </a:p>
+          <a:p>
+            <a:pPr lvl="0"/>
+            <a:r>
+              <a:rPr/>
+              <a:t>La commune supporte le coût de la plantation.</a:t>
+            </a:r>
+          </a:p>
+          <a:p>
+            <a:pPr lvl="0"/>
+            <a:r>
+              <a:rPr/>
+              <a:t>Le budget couvre la création des fosses et les petits travaux associés.</a:t>
+            </a:r>
+          </a:p>
+          <a:p>
+            <a:pPr lvl="0"/>
+            <a:r>
+              <a:rPr/>
+              <a:t>Les habitants prennent en charge l’entretien (arrosage et taille).</a:t>
+            </a:r>
+          </a:p>
+        </p:txBody>
+      </p:sp>
+    </p:spTree>
+  </p:cSld>
+</p:sld>
+</file>
+
+<file path=ppt/slides/slide15.xml><?xml version="1.0" encoding="utf-8"?>
+<p:sld xmlns:a="http://schemas.openxmlformats.org/drawingml/2006/main" xmlns:r="http://schemas.openxmlformats.org/officeDocument/2006/relationships" xmlns:p="http://schemas.openxmlformats.org/presentationml/2006/main">
+  <p:cSld>
+    <p:spTree>
+      <p:nvGrpSpPr>
+        <p:cNvPr id="1" name=""/>
+        <p:cNvGrpSpPr/>
+        <p:nvPr/>
+      </p:nvGrpSpPr>
+      <p:grpSpPr>
+        <a:xfrm>
+          <a:off x="0" y="0"/>
+          <a:ext cx="0" cy="0"/>
+          <a:chOff x="0" y="0"/>
+          <a:chExt cx="0" cy="0"/>
+        </a:xfrm>
+      </p:grpSpPr>
+      <p:sp>
+        <p:nvSpPr>
+          <p:cNvPr id="2" name="Title 1"/>
+          <p:cNvSpPr>
+            <a:spLocks noGrp="1"/>
+          </p:cNvSpPr>
+          <p:nvPr>
+            <p:ph type="title"/>
+          </p:nvPr>
+        </p:nvSpPr>
+        <p:spPr/>
+        <p:txBody>
+          <a:bodyPr/>
+          <a:lstStyle/>
+          <a:p>
+            <a:pPr lvl="0" indent="0" marL="0">
+              <a:buNone/>
+            </a:pPr>
+            <a:r>
+              <a:rPr/>
+              <a:t>Suivi et évaluation</a:t>
+            </a:r>
+          </a:p>
+        </p:txBody>
+      </p:sp>
+      <p:sp>
+        <p:nvSpPr>
+          <p:cNvPr id="3" name="Content Placeholder 2"/>
+          <p:cNvSpPr>
+            <a:spLocks noGrp="1"/>
+          </p:cNvSpPr>
+          <p:nvPr>
+            <p:ph idx="1"/>
+          </p:nvPr>
+        </p:nvSpPr>
+        <p:spPr/>
+        <p:txBody>
+          <a:bodyPr/>
+          <a:lstStyle/>
+          <a:p>
+            <a:pPr lvl="0" indent="0" marL="0">
+              <a:buNone/>
+            </a:pPr>
+            <a:r>
+              <a:rPr b="1"/>
+              <a:t>Mesurer simplement les résultats</a:t>
+            </a:r>
+          </a:p>
+          <a:p>
+            <a:pPr lvl="0"/>
+            <a:r>
+              <a:rPr/>
+              <a:t>Nombre de volontaires.</a:t>
+            </a:r>
+          </a:p>
+          <a:p>
+            <a:pPr lvl="0"/>
+            <a:r>
+              <a:rPr/>
+              <a:t>Nombre de fosses créées.</a:t>
+            </a:r>
+          </a:p>
+          <a:p>
+            <a:pPr lvl="0"/>
+            <a:r>
+              <a:rPr/>
+              <a:t>Taux d’échec (pas d’entretien).</a:t>
+            </a:r>
+          </a:p>
+          <a:p>
+            <a:pPr lvl="0"/>
+            <a:r>
+              <a:rPr/>
+              <a:t>Satisfaction des habitants.</a:t>
+            </a:r>
+          </a:p>
+        </p:txBody>
+      </p:sp>
+    </p:spTree>
+  </p:cSld>
+</p:sld>
+</file>
+
+<file path=ppt/slides/slide16.xml><?xml version="1.0" encoding="utf-8"?>
+<p:sld xmlns:a="http://schemas.openxmlformats.org/drawingml/2006/main" xmlns:r="http://schemas.openxmlformats.org/officeDocument/2006/relationships" xmlns:p="http://schemas.openxmlformats.org/presentationml/2006/main">
+  <p:cSld>
+    <p:spTree>
+      <p:nvGrpSpPr>
+        <p:cNvPr id="1" name=""/>
+        <p:cNvGrpSpPr/>
+        <p:nvPr/>
+      </p:nvGrpSpPr>
+      <p:grpSpPr>
+        <a:xfrm>
+          <a:off x="0" y="0"/>
+          <a:ext cx="0" cy="0"/>
+          <a:chOff x="0" y="0"/>
+          <a:chExt cx="0" cy="0"/>
+        </a:xfrm>
+      </p:grpSpPr>
+      <p:sp>
+        <p:nvSpPr>
+          <p:cNvPr id="2" name="Title 1"/>
+          <p:cNvSpPr>
+            <a:spLocks noGrp="1"/>
+          </p:cNvSpPr>
+          <p:nvPr>
+            <p:ph type="title"/>
+          </p:nvPr>
+        </p:nvSpPr>
+        <p:spPr/>
+        <p:txBody>
+          <a:bodyPr/>
+          <a:lstStyle/>
+          <a:p>
+            <a:pPr lvl="0" indent="0" marL="0">
+              <a:buNone/>
+            </a:pPr>
+            <a:r>
+              <a:rPr/>
+              <a:t>Ce que le conseil municipal doit approuver</a:t>
+            </a:r>
+          </a:p>
+        </p:txBody>
+      </p:sp>
+      <p:sp>
+        <p:nvSpPr>
+          <p:cNvPr id="3" name="Content Placeholder 2"/>
+          <p:cNvSpPr>
+            <a:spLocks noGrp="1"/>
+          </p:cNvSpPr>
+          <p:nvPr>
+            <p:ph idx="1"/>
+          </p:nvPr>
+        </p:nvSpPr>
+        <p:spPr/>
+        <p:txBody>
+          <a:bodyPr/>
+          <a:lstStyle/>
+          <a:p>
+            <a:pPr lvl="0"/>
+            <a:r>
+              <a:rPr/>
+              <a:t>Le principe du programme.</a:t>
+            </a:r>
+          </a:p>
+          <a:p>
+            <a:pPr lvl="0"/>
+            <a:r>
+              <a:rPr/>
+              <a:t>La prise en charge par la mairie du coût des fosses.</a:t>
+            </a:r>
+          </a:p>
+          <a:p>
+            <a:pPr lvl="0"/>
+            <a:r>
+              <a:rPr/>
+              <a:t>La convention qui sera proposée.</a:t>
+            </a:r>
+          </a:p>
+          <a:p>
+            <a:pPr lvl="0"/>
+            <a:r>
+              <a:rPr/>
+              <a:t>L’achat de 100 pieds de jasmins et 100 pieds de chevrefeuille (10 Euros par pied).</a:t>
+            </a:r>
+          </a:p>
+        </p:txBody>
+      </p:sp>
+    </p:spTree>
+  </p:cSld>
+</p:sld>
+</file>
+
+<file path=ppt/slides/slide17.xml><?xml version="1.0" encoding="utf-8"?>
+<p:sld xmlns:a="http://schemas.openxmlformats.org/drawingml/2006/main" xmlns:r="http://schemas.openxmlformats.org/officeDocument/2006/relationships" xmlns:p="http://schemas.openxmlformats.org/presentationml/2006/main">
+  <p:cSld>
+    <p:spTree>
+      <p:nvGrpSpPr>
+        <p:cNvPr id="1" name=""/>
+        <p:cNvGrpSpPr/>
+        <p:nvPr/>
+      </p:nvGrpSpPr>
+      <p:grpSpPr>
+        <a:xfrm>
+          <a:off x="0" y="0"/>
+          <a:ext cx="0" cy="0"/>
+          <a:chOff x="0" y="0"/>
+          <a:chExt cx="0" cy="0"/>
+        </a:xfrm>
+      </p:grpSpPr>
+      <p:sp>
+        <p:nvSpPr>
+          <p:cNvPr id="2" name="Title 1"/>
+          <p:cNvSpPr>
+            <a:spLocks noGrp="1"/>
+          </p:cNvSpPr>
+          <p:nvPr>
+            <p:ph type="title"/>
+          </p:nvPr>
+        </p:nvSpPr>
+        <p:spPr/>
+        <p:txBody>
+          <a:bodyPr/>
+          <a:lstStyle/>
+          <a:p>
+            <a:pPr lvl="0" indent="0" marL="0">
+              <a:buNone/>
+            </a:pPr>
+            <a:r>
+              <a:rPr/>
+              <a:t>Planning</a:t>
+            </a:r>
+          </a:p>
+        </p:txBody>
+      </p:sp>
+      <p:sp>
+        <p:nvSpPr>
+          <p:cNvPr id="3" name="Content Placeholder 2"/>
+          <p:cNvSpPr>
+            <a:spLocks noGrp="1"/>
+          </p:cNvSpPr>
+          <p:nvPr>
+            <p:ph idx="1"/>
+          </p:nvPr>
+        </p:nvSpPr>
+        <p:spPr/>
+        <p:txBody>
+          <a:bodyPr/>
+          <a:lstStyle/>
+          <a:p>
+            <a:pPr lvl="0" indent="0" marL="0">
+              <a:buNone/>
+            </a:pPr>
+            <a:r>
+              <a:rPr b="1"/>
+              <a:t>Pour viser un deploiement Printemps 2027</a:t>
+            </a:r>
+          </a:p>
+          <a:p>
+            <a:pPr lvl="0"/>
+            <a:r>
+              <a:rPr/>
+              <a:t>Approbation par le conseil municipal : Octobre 2026</a:t>
+            </a:r>
+          </a:p>
+          <a:p>
+            <a:pPr lvl="0"/>
+            <a:r>
+              <a:rPr/>
+              <a:t>Réunion public fin 2026</a:t>
+            </a:r>
+          </a:p>
+          <a:p>
+            <a:pPr lvl="0"/>
+            <a:r>
+              <a:rPr/>
+              <a:t>Bulletin municipal : bouclage octobre 2026, parution Janvier 2027</a:t>
+            </a:r>
+          </a:p>
+          <a:p>
+            <a:pPr lvl="0"/>
+            <a:r>
+              <a:rPr/>
+              <a:t>Mise en place des fosses : Hiver/Printemps 2027</a:t>
+            </a:r>
+          </a:p>
+        </p:txBody>
+      </p:sp>
+    </p:spTree>
+  </p:cSld>
+</p:sld>
+</file>
+
+<file path=ppt/slides/slide18.xml><?xml version="1.0" encoding="utf-8"?>
+<p:sld xmlns:a="http://schemas.openxmlformats.org/drawingml/2006/main" xmlns:r="http://schemas.openxmlformats.org/officeDocument/2006/relationships" xmlns:p="http://schemas.openxmlformats.org/presentationml/2006/main">
+  <p:cSld>
+    <p:spTree>
+      <p:nvGrpSpPr>
+        <p:cNvPr id="1" name=""/>
+        <p:cNvGrpSpPr/>
+        <p:nvPr/>
+      </p:nvGrpSpPr>
+      <p:grpSpPr>
+        <a:xfrm>
+          <a:off x="0" y="0"/>
+          <a:ext cx="0" cy="0"/>
+          <a:chOff x="0" y="0"/>
+          <a:chExt cx="0" cy="0"/>
+        </a:xfrm>
+      </p:grpSpPr>
+      <p:sp>
+        <p:nvSpPr>
+          <p:cNvPr id="2" name="Title 1"/>
+          <p:cNvSpPr>
+            <a:spLocks noGrp="1"/>
+          </p:cNvSpPr>
+          <p:nvPr>
+            <p:ph type="title"/>
+          </p:nvPr>
+        </p:nvSpPr>
+        <p:spPr/>
+        <p:txBody>
+          <a:bodyPr/>
+          <a:lstStyle/>
+          <a:p>
+            <a:pPr lvl="0" indent="0" marL="0">
+              <a:buNone/>
+            </a:pPr>
+            <a:r>
+              <a:rPr/>
+              <a:t>Conclusion</a:t>
+            </a:r>
+          </a:p>
+        </p:txBody>
+      </p:sp>
+      <p:sp>
+        <p:nvSpPr>
+          <p:cNvPr id="3" name="Content Placeholder 2"/>
+          <p:cNvSpPr>
+            <a:spLocks noGrp="1"/>
+          </p:cNvSpPr>
+          <p:nvPr>
+            <p:ph idx="1"/>
+          </p:nvPr>
+        </p:nvSpPr>
+        <p:spPr/>
+        <p:txBody>
+          <a:bodyPr/>
+          <a:lstStyle/>
+          <a:p>
+            <a:pPr lvl="0" indent="0" marL="0">
+              <a:buNone/>
+            </a:pPr>
+            <a:r>
+              <a:rPr b="1"/>
+              <a:t>Un projet simple, utile et fédérateur</a:t>
+            </a:r>
+          </a:p>
+          <a:p>
+            <a:pPr lvl="0"/>
+            <a:r>
+              <a:rPr/>
+              <a:t>Ce programme permet d’agir vite, à coût maîtrisé, avec les habitants, pour adapter le village aux canicules.</a:t>
+            </a:r>
+          </a:p>
+          <a:p>
+            <a:pPr lvl="0"/>
+            <a:r>
+              <a:rPr/>
+              <a:t>Les vrais bénéfices apparaîtront 2 ou 3 ans après le lancement, le temps que les végétaux poussent.</a:t>
+            </a:r>
+          </a:p>
+          <a:p>
+            <a:pPr lvl="0"/>
+            <a:r>
+              <a:rPr/>
+              <a:t>Un facteur clé de succès : Le portage et la mobilisation des élus.</a:t>
+            </a:r>
+          </a:p>
+        </p:txBody>
+      </p:sp>
+    </p:spTree>
+  </p:cSld>
+</p:sld>
+</file>
+
+<file path=ppt/slides/slide19.xml><?xml version="1.0" encoding="utf-8"?>
+<p:sld xmlns:a="http://schemas.openxmlformats.org/drawingml/2006/main" xmlns:r="http://schemas.openxmlformats.org/officeDocument/2006/relationships" xmlns:p="http://schemas.openxmlformats.org/presentationml/2006/main">
+  <p:cSld>
+    <p:spTree>
+      <p:nvGrpSpPr>
+        <p:cNvPr id="1" name=""/>
+        <p:cNvGrpSpPr/>
+        <p:nvPr/>
+      </p:nvGrpSpPr>
+      <p:grpSpPr>
+        <a:xfrm>
+          <a:off x="0" y="0"/>
+          <a:ext cx="0" cy="0"/>
+          <a:chOff x="0" y="0"/>
+          <a:chExt cx="0" cy="0"/>
+        </a:xfrm>
+      </p:grpSpPr>
+      <p:sp>
+        <p:nvSpPr>
+          <p:cNvPr id="2" name="Title 1"/>
+          <p:cNvSpPr>
+            <a:spLocks noGrp="1"/>
+          </p:cNvSpPr>
+          <p:nvPr>
+            <p:ph type="title"/>
+          </p:nvPr>
+        </p:nvSpPr>
+        <p:spPr/>
+        <p:txBody>
+          <a:bodyPr/>
+          <a:lstStyle/>
+          <a:p>
+            <a:pPr lvl="0" indent="0" marL="0">
+              <a:buNone/>
+            </a:pPr>
+            <a:r>
+              <a:rPr/>
+              <a:t>Avant / Après</a:t>
+            </a:r>
+          </a:p>
+        </p:txBody>
+      </p:sp>
+      <p:pic>
+        <p:nvPicPr>
+          <p:cNvPr descr="images/rue_4_s.jpg" id="0" name="Picture 1"/>
+          <p:cNvPicPr>
+            <a:picLocks noGrp="1" noChangeAspect="1"/>
+          </p:cNvPicPr>
+          <p:nvPr/>
+        </p:nvPicPr>
+        <p:blipFill>
+          <a:blip r:embed="rId2"/>
+          <a:stretch>
+            <a:fillRect/>
+          </a:stretch>
+        </p:blipFill>
+        <p:spPr bwMode="auto">
+          <a:xfrm>
+            <a:off x="2311400" y="1193800"/>
+            <a:ext cx="4533900" cy="2882900"/>
+          </a:xfrm>
+          <a:prstGeom prst="rect">
+            <a:avLst/>
+          </a:prstGeom>
+          <a:noFill/>
+          <a:ln w="9525">
+            <a:noFill/>
+            <a:headEnd/>
+            <a:tailEnd/>
+          </a:ln>
+        </p:spPr>
+      </p:pic>
+      <p:sp>
+        <p:nvSpPr>
+          <p:cNvPr id="1" name="TextBox 3"/>
+          <p:cNvSpPr txBox="1"/>
+          <p:nvPr>
+            <p:ph idx="1"/>
+          </p:nvPr>
+        </p:nvSpPr>
+        <p:spPr>
+          <a:xfrm>
+            <a:off x="457200" y="4076700"/>
+            <a:ext cx="8229600" cy="508000"/>
+          </a:xfrm>
+          <a:prstGeom prst="rect">
+            <a:avLst/>
+          </a:prstGeom>
+          <a:noFill/>
+        </p:spPr>
+        <p:txBody>
+          <a:bodyPr/>
+          <a:lstStyle/>
+          <a:p>
+            <a:pPr lvl="0" indent="0" marL="0" algn="ctr">
+              <a:buNone/>
+            </a:pPr>
+            <a:r>
+              <a:rPr/>
+              <a:t>Exemples de végétalisation</a:t>
+            </a:r>
+          </a:p>
+        </p:txBody>
+      </p:sp>
+    </p:spTree>
+  </p:cSld>
+</p:sld>
+</file>
+
+<file path=ppt/slides/slide2.xml><?xml version="1.0" encoding="utf-8"?>
+<p:sld xmlns:a="http://schemas.openxmlformats.org/drawingml/2006/main" xmlns:r="http://schemas.openxmlformats.org/officeDocument/2006/relationships" xmlns:p="http://schemas.openxmlformats.org/presentationml/2006/main">
+  <p:cSld>
+    <p:spTree>
+      <p:nvGrpSpPr>
+        <p:cNvPr id="1" name=""/>
+        <p:cNvGrpSpPr/>
+        <p:nvPr/>
+      </p:nvGrpSpPr>
+      <p:grpSpPr>
+        <a:xfrm>
+          <a:off x="0" y="0"/>
+          <a:ext cx="0" cy="0"/>
+          <a:chOff x="0" y="0"/>
+          <a:chExt cx="0" cy="0"/>
+        </a:xfrm>
+      </p:grpSpPr>
+      <p:sp>
+        <p:nvSpPr>
+          <p:cNvPr id="2" name="Title 1"/>
+          <p:cNvSpPr>
+            <a:spLocks noGrp="1"/>
+          </p:cNvSpPr>
+          <p:nvPr>
+            <p:ph type="title"/>
+          </p:nvPr>
+        </p:nvSpPr>
+        <p:spPr/>
+        <p:txBody>
+          <a:bodyPr/>
+          <a:lstStyle/>
+          <a:p>
+            <a:pPr lvl="0" indent="0" marL="0">
+              <a:buNone/>
+            </a:pPr>
+            <a:r>
+              <a:rPr/>
+              <a:t>Pourquoi végétaliser ?</a:t>
+            </a:r>
+          </a:p>
+        </p:txBody>
+      </p:sp>
+      <p:sp>
+        <p:nvSpPr>
+          <p:cNvPr id="3" name="Content Placeholder 2"/>
+          <p:cNvSpPr>
+            <a:spLocks noGrp="1"/>
+          </p:cNvSpPr>
+          <p:nvPr>
+            <p:ph idx="1"/>
+          </p:nvPr>
+        </p:nvSpPr>
+        <p:spPr/>
+        <p:txBody>
+          <a:bodyPr/>
+          <a:lstStyle/>
+          <a:p>
+            <a:pPr lvl="0" indent="0" marL="0">
+              <a:buNone/>
+            </a:pPr>
+            <a:r>
+              <a:rPr b="1"/>
+              <a:t>Adapter le village à la succession de canicules </a:t>
+            </a:r>
+          </a:p>
+          <a:p>
+            <a:pPr lvl="0"/>
+            <a:r>
+              <a:rPr/>
+              <a:t>Réduire la température des façades de </a:t>
+            </a:r>
+            <a:r>
+              <a:rPr b="1"/>
+              <a:t>4 à 6 °C</a:t>
+            </a:r>
+            <a:r>
+              <a:rPr/>
+              <a:t>.</a:t>
+            </a:r>
+          </a:p>
+          <a:p>
+            <a:pPr lvl="0"/>
+            <a:r>
+              <a:rPr/>
+              <a:t>Améliorer le confort d’été des riverains et des passants.</a:t>
+            </a:r>
+          </a:p>
+          <a:p>
+            <a:pPr lvl="0"/>
+            <a:r>
+              <a:rPr/>
+              <a:t>Permettre aux riverains, sous le contrôle de la mairie, de planter sur les trottoirs: Il est normalement interdit de modifier le domaine public.</a:t>
+            </a:r>
+          </a:p>
+          <a:p>
+            <a:pPr lvl="0"/>
+            <a:r>
+              <a:rPr/>
+              <a:t>Agir : ne plus subir son environnement.</a:t>
+            </a:r>
+          </a:p>
+        </p:txBody>
+      </p:sp>
+    </p:spTree>
+  </p:cSld>
+</p:sld>
+</file>
+
+<file path=ppt/slides/slide20.xml><?xml version="1.0" encoding="utf-8"?>
+<p:sld xmlns:a="http://schemas.openxmlformats.org/drawingml/2006/main" xmlns:r="http://schemas.openxmlformats.org/officeDocument/2006/relationships" xmlns:p="http://schemas.openxmlformats.org/presentationml/2006/main">
+  <p:cSld>
+    <p:spTree>
+      <p:nvGrpSpPr>
+        <p:cNvPr id="1" name=""/>
+        <p:cNvGrpSpPr/>
+        <p:nvPr/>
+      </p:nvGrpSpPr>
+      <p:grpSpPr>
+        <a:xfrm>
+          <a:off x="0" y="0"/>
+          <a:ext cx="0" cy="0"/>
+          <a:chOff x="0" y="0"/>
+          <a:chExt cx="0" cy="0"/>
+        </a:xfrm>
+      </p:grpSpPr>
+      <p:sp>
+        <p:nvSpPr>
+          <p:cNvPr id="2" name="Title 1"/>
+          <p:cNvSpPr>
+            <a:spLocks noGrp="1"/>
+          </p:cNvSpPr>
+          <p:nvPr>
+            <p:ph type="title"/>
+          </p:nvPr>
+        </p:nvSpPr>
+        <p:spPr/>
+        <p:txBody>
+          <a:bodyPr/>
+          <a:lstStyle/>
+          <a:p>
+            <a:pPr lvl="0" indent="0" marL="0">
+              <a:buNone/>
+            </a:pPr>
+            <a:r>
+              <a:rPr/>
+              <a:t>A développer</a:t>
+            </a:r>
+          </a:p>
+        </p:txBody>
+      </p:sp>
+      <p:sp>
+        <p:nvSpPr>
+          <p:cNvPr id="3" name="Content Placeholder 2"/>
+          <p:cNvSpPr>
+            <a:spLocks noGrp="1"/>
+          </p:cNvSpPr>
+          <p:nvPr>
+            <p:ph idx="1"/>
+          </p:nvPr>
+        </p:nvSpPr>
+        <p:spPr/>
+        <p:txBody>
+          <a:bodyPr/>
+          <a:lstStyle/>
+          <a:p>
+            <a:pPr lvl="0"/>
+            <a:r>
+              <a:rPr/>
+              <a:t>Zone pavillonnaire : végétaliser les bords de route.</a:t>
+            </a:r>
+          </a:p>
+          <a:p>
+            <a:pPr lvl="0"/>
+            <a:r>
+              <a:rPr/>
+              <a:t>Relations et contacts avec ABF et autres organismes officiels (CAUE 82).</a:t>
+            </a:r>
+          </a:p>
+          <a:p>
+            <a:pPr lvl="0"/>
+            <a:r>
+              <a:rPr/>
+              <a:t>Aides au financement : “Le Fonds vert” (État) , “Ma Solution pour le Climat” (Région)</a:t>
+            </a:r>
+          </a:p>
+        </p:txBody>
+      </p:sp>
+    </p:spTree>
+  </p:cSld>
+</p:sld>
+</file>
+
+<file path=ppt/slides/slide3.xml><?xml version="1.0" encoding="utf-8"?>
+<p:sld xmlns:a="http://schemas.openxmlformats.org/drawingml/2006/main" xmlns:r="http://schemas.openxmlformats.org/officeDocument/2006/relationships" xmlns:p="http://schemas.openxmlformats.org/presentationml/2006/main">
+  <p:cSld>
+    <p:spTree>
+      <p:nvGrpSpPr>
+        <p:cNvPr id="1" name=""/>
+        <p:cNvGrpSpPr/>
+        <p:nvPr/>
+      </p:nvGrpSpPr>
+      <p:grpSpPr>
+        <a:xfrm>
+          <a:off x="0" y="0"/>
+          <a:ext cx="0" cy="0"/>
+          <a:chOff x="0" y="0"/>
+          <a:chExt cx="0" cy="0"/>
+        </a:xfrm>
+      </p:grpSpPr>
+      <p:sp>
+        <p:nvSpPr>
+          <p:cNvPr id="2" name="Title 1"/>
+          <p:cNvSpPr>
+            <a:spLocks noGrp="1"/>
+          </p:cNvSpPr>
+          <p:nvPr>
+            <p:ph type="title"/>
+          </p:nvPr>
+        </p:nvSpPr>
+        <p:spPr/>
+        <p:txBody>
+          <a:bodyPr/>
+          <a:lstStyle/>
+          <a:p>
+            <a:pPr lvl="0" indent="0" marL="0">
+              <a:buNone/>
+            </a:pPr>
+            <a:r>
+              <a:rPr/>
+              <a:t>Comment végétaliser le village</a:t>
+            </a:r>
+          </a:p>
+        </p:txBody>
+      </p:sp>
+      <p:sp>
+        <p:nvSpPr>
+          <p:cNvPr id="3" name="Content Placeholder 2"/>
+          <p:cNvSpPr>
+            <a:spLocks noGrp="1"/>
+          </p:cNvSpPr>
+          <p:nvPr>
+            <p:ph idx="1"/>
+          </p:nvPr>
+        </p:nvSpPr>
+        <p:spPr/>
+        <p:txBody>
+          <a:bodyPr/>
+          <a:lstStyle/>
+          <a:p>
+            <a:pPr lvl="0"/>
+            <a:r>
+              <a:rPr b="1"/>
+              <a:t>La mairie n’a pas les moyens d’entretenir des plantations en nombre</a:t>
+            </a:r>
+          </a:p>
+          <a:p>
+            <a:pPr lvl="0"/>
+            <a:r>
+              <a:rPr b="1"/>
+              <a:t>Pour avoir des résultats rapides et massifs, il faut associer les habitants</a:t>
+            </a:r>
+          </a:p>
+          <a:p>
+            <a:pPr lvl="0"/>
+            <a:r>
+              <a:rPr i="1"/>
+              <a:t>La commune crée des fosses de plantation sur le domaine public.</a:t>
+            </a:r>
+          </a:p>
+          <a:p>
+            <a:pPr lvl="0"/>
+            <a:r>
+              <a:rPr i="1"/>
+              <a:t>Les habitants s’occupent des végétaux : arrosage, taille, soins.</a:t>
+            </a:r>
+          </a:p>
+        </p:txBody>
+      </p:sp>
+    </p:spTree>
+  </p:cSld>
+</p:sld>
+</file>
+
+<file path=ppt/slides/slide4.xml><?xml version="1.0" encoding="utf-8"?>
+<p:sld xmlns:a="http://schemas.openxmlformats.org/drawingml/2006/main" xmlns:r="http://schemas.openxmlformats.org/officeDocument/2006/relationships" xmlns:p="http://schemas.openxmlformats.org/presentationml/2006/main">
+  <p:cSld>
+    <p:spTree>
+      <p:nvGrpSpPr>
+        <p:cNvPr id="1" name=""/>
+        <p:cNvGrpSpPr/>
+        <p:nvPr/>
+      </p:nvGrpSpPr>
+      <p:grpSpPr>
+        <a:xfrm>
+          <a:off x="0" y="0"/>
+          <a:ext cx="0" cy="0"/>
+          <a:chOff x="0" y="0"/>
+          <a:chExt cx="0" cy="0"/>
+        </a:xfrm>
+      </p:grpSpPr>
+      <p:sp>
+        <p:nvSpPr>
+          <p:cNvPr id="2" name="Title 1"/>
+          <p:cNvSpPr>
+            <a:spLocks noGrp="1"/>
+          </p:cNvSpPr>
+          <p:nvPr>
+            <p:ph type="title"/>
+          </p:nvPr>
+        </p:nvSpPr>
+        <p:spPr/>
+        <p:txBody>
+          <a:bodyPr/>
+          <a:lstStyle/>
+          <a:p>
+            <a:pPr lvl="0" indent="0" marL="0">
+              <a:buNone/>
+            </a:pPr>
+            <a:r>
+              <a:rPr/>
+              <a:t>Avant / Après</a:t>
+            </a:r>
+          </a:p>
+        </p:txBody>
+      </p:sp>
+      <p:pic>
+        <p:nvPicPr>
+          <p:cNvPr descr="images/rue_3_s.jpg" id="0" name="Picture 1"/>
+          <p:cNvPicPr>
+            <a:picLocks noGrp="1" noChangeAspect="1"/>
+          </p:cNvPicPr>
+          <p:nvPr/>
+        </p:nvPicPr>
+        <p:blipFill>
+          <a:blip r:embed="rId2"/>
+          <a:stretch>
+            <a:fillRect/>
+          </a:stretch>
+        </p:blipFill>
+        <p:spPr bwMode="auto">
+          <a:xfrm>
+            <a:off x="3581400" y="1193800"/>
+            <a:ext cx="1993900" cy="2882900"/>
+          </a:xfrm>
+          <a:prstGeom prst="rect">
+            <a:avLst/>
+          </a:prstGeom>
+          <a:noFill/>
+          <a:ln w="9525">
+            <a:noFill/>
+            <a:headEnd/>
+            <a:tailEnd/>
+          </a:ln>
+        </p:spPr>
+      </p:pic>
+      <p:sp>
+        <p:nvSpPr>
+          <p:cNvPr id="1" name="TextBox 3"/>
+          <p:cNvSpPr txBox="1"/>
+          <p:nvPr>
+            <p:ph idx="1"/>
+          </p:nvPr>
+        </p:nvSpPr>
+        <p:spPr>
+          <a:xfrm>
+            <a:off x="457200" y="4076700"/>
+            <a:ext cx="8229600" cy="508000"/>
+          </a:xfrm>
+          <a:prstGeom prst="rect">
+            <a:avLst/>
+          </a:prstGeom>
+          <a:noFill/>
+        </p:spPr>
+        <p:txBody>
+          <a:bodyPr/>
+          <a:lstStyle/>
+          <a:p>
+            <a:pPr lvl="0" indent="0" marL="0" algn="ctr">
+              <a:buNone/>
+            </a:pPr>
+            <a:r>
+              <a:rPr/>
+              <a:t>Exemples de végétalisation dans les ruelles</a:t>
+            </a:r>
+          </a:p>
+        </p:txBody>
+      </p:sp>
+    </p:spTree>
+  </p:cSld>
+</p:sld>
+</file>
+
+<file path=ppt/slides/slide5.xml><?xml version="1.0" encoding="utf-8"?>
+<p:sld xmlns:a="http://schemas.openxmlformats.org/drawingml/2006/main" xmlns:r="http://schemas.openxmlformats.org/officeDocument/2006/relationships" xmlns:p="http://schemas.openxmlformats.org/presentationml/2006/main">
+  <p:cSld>
+    <p:spTree>
+      <p:nvGrpSpPr>
+        <p:cNvPr id="1" name=""/>
+        <p:cNvGrpSpPr/>
+        <p:nvPr/>
+      </p:nvGrpSpPr>
+      <p:grpSpPr>
+        <a:xfrm>
+          <a:off x="0" y="0"/>
+          <a:ext cx="0" cy="0"/>
+          <a:chOff x="0" y="0"/>
+          <a:chExt cx="0" cy="0"/>
+        </a:xfrm>
+      </p:grpSpPr>
+      <p:sp>
+        <p:nvSpPr>
+          <p:cNvPr id="2" name="Title 1"/>
+          <p:cNvSpPr>
+            <a:spLocks noGrp="1"/>
+          </p:cNvSpPr>
+          <p:nvPr>
+            <p:ph type="title"/>
+          </p:nvPr>
+        </p:nvSpPr>
+        <p:spPr/>
+        <p:txBody>
+          <a:bodyPr/>
+          <a:lstStyle/>
+          <a:p>
+            <a:pPr lvl="0" indent="0" marL="0">
+              <a:buNone/>
+            </a:pPr>
+            <a:r>
+              <a:rPr/>
+              <a:t>Un projet inspiré d’exemples réussis</a:t>
+            </a:r>
+          </a:p>
+        </p:txBody>
+      </p:sp>
+      <p:sp>
+        <p:nvSpPr>
+          <p:cNvPr id="3" name="Content Placeholder 2"/>
+          <p:cNvSpPr>
+            <a:spLocks noGrp="1"/>
+          </p:cNvSpPr>
+          <p:nvPr>
+            <p:ph idx="1"/>
+          </p:nvPr>
+        </p:nvSpPr>
+        <p:spPr/>
+        <p:txBody>
+          <a:bodyPr/>
+          <a:lstStyle/>
+          <a:p>
+            <a:pPr lvl="0"/>
+            <a:r>
+              <a:rPr/>
+              <a:t>Marguerittes (Gard) </a:t>
+            </a:r>
+            <a:r>
+              <a:rPr>
+                <a:hlinkClick r:id="rId2"/>
+              </a:rPr>
+              <a:t>(site)</a:t>
+            </a:r>
+          </a:p>
+          <a:p>
+            <a:pPr lvl="0"/>
+            <a:r>
+              <a:rPr/>
+              <a:t>Végétaliser Banyuls, c’est permis ! </a:t>
+            </a:r>
+            <a:r>
+              <a:rPr>
+                <a:hlinkClick r:id="rId3"/>
+              </a:rPr>
+              <a:t>(site)</a:t>
+            </a:r>
+          </a:p>
+          <a:p>
+            <a:pPr lvl="0"/>
+            <a:r>
+              <a:rPr/>
+              <a:t>Saint-Nazaire-d’Aude : La commune fournit un « Kit de plantation » complet (plante locale, paillage, terreau et tuteur de protection) dès que la fosse est créée par la mairie. </a:t>
+            </a:r>
+            <a:r>
+              <a:rPr>
+                <a:hlinkClick r:id="rId4"/>
+              </a:rPr>
+              <a:t>(site)</a:t>
+            </a:r>
+          </a:p>
+        </p:txBody>
+      </p:sp>
+    </p:spTree>
+  </p:cSld>
+</p:sld>
+</file>
+
+<file path=ppt/slides/slide6.xml><?xml version="1.0" encoding="utf-8"?>
+<p:sld xmlns:a="http://schemas.openxmlformats.org/drawingml/2006/main" xmlns:r="http://schemas.openxmlformats.org/officeDocument/2006/relationships" xmlns:p="http://schemas.openxmlformats.org/presentationml/2006/main">
+  <p:cSld>
+    <p:spTree>
+      <p:nvGrpSpPr>
+        <p:cNvPr id="1" name=""/>
+        <p:cNvGrpSpPr/>
+        <p:nvPr/>
+      </p:nvGrpSpPr>
+      <p:grpSpPr>
+        <a:xfrm>
+          <a:off x="0" y="0"/>
+          <a:ext cx="0" cy="0"/>
+          <a:chOff x="0" y="0"/>
+          <a:chExt cx="0" cy="0"/>
+        </a:xfrm>
+      </p:grpSpPr>
+      <p:sp>
+        <p:nvSpPr>
+          <p:cNvPr id="2" name="Title 1"/>
+          <p:cNvSpPr>
+            <a:spLocks noGrp="1"/>
+          </p:cNvSpPr>
+          <p:nvPr>
+            <p:ph type="title"/>
+          </p:nvPr>
+        </p:nvSpPr>
+        <p:spPr/>
+        <p:txBody>
+          <a:bodyPr/>
+          <a:lstStyle/>
+          <a:p>
+            <a:pPr lvl="0" indent="0" marL="0">
+              <a:buNone/>
+            </a:pPr>
+            <a:r>
+              <a:rPr/>
+              <a:t>Organismes officiels d’accompagnement</a:t>
+            </a:r>
+          </a:p>
+        </p:txBody>
+      </p:sp>
+      <p:sp>
+        <p:nvSpPr>
+          <p:cNvPr id="3" name="Content Placeholder 2"/>
+          <p:cNvSpPr>
+            <a:spLocks noGrp="1"/>
+          </p:cNvSpPr>
+          <p:nvPr>
+            <p:ph idx="1"/>
+          </p:nvPr>
+        </p:nvSpPr>
+        <p:spPr/>
+        <p:txBody>
+          <a:bodyPr/>
+          <a:lstStyle/>
+          <a:p>
+            <a:pPr lvl="0"/>
+            <a:r>
+              <a:rPr/>
+              <a:t>Le CAUE 82 (Conseil d’Architecture, d’Urbanisme et de l’Environnement) est un organisme investi d’une mission d’intérêt public.</a:t>
+            </a:r>
+          </a:p>
+          <a:p>
+            <a:pPr lvl="0"/>
+            <a:r>
+              <a:rPr/>
+              <a:t>Il propose un certain nombre de ressources pour ce type de projet.</a:t>
+            </a:r>
+          </a:p>
+          <a:p>
+            <a:pPr lvl="0"/>
+            <a:r>
+              <a:rPr>
+                <a:hlinkClick r:id="rId2"/>
+              </a:rPr>
+              <a:t>caue-occitanie :</a:t>
+            </a:r>
+            <a:r>
+              <a:rPr/>
+              <a:t> dossier permis de végétaliser</a:t>
+            </a:r>
+          </a:p>
+        </p:txBody>
+      </p:sp>
+    </p:spTree>
+  </p:cSld>
+</p:sld>
+</file>
+
+<file path=ppt/slides/slide7.xml><?xml version="1.0" encoding="utf-8"?>
+<p:sld xmlns:a="http://schemas.openxmlformats.org/drawingml/2006/main" xmlns:r="http://schemas.openxmlformats.org/officeDocument/2006/relationships" xmlns:p="http://schemas.openxmlformats.org/presentationml/2006/main">
+  <p:cSld>
+    <p:spTree>
+      <p:nvGrpSpPr>
+        <p:cNvPr id="1" name=""/>
+        <p:cNvGrpSpPr/>
+        <p:nvPr/>
+      </p:nvGrpSpPr>
+      <p:grpSpPr>
+        <a:xfrm>
+          <a:off x="0" y="0"/>
+          <a:ext cx="0" cy="0"/>
+          <a:chOff x="0" y="0"/>
+          <a:chExt cx="0" cy="0"/>
+        </a:xfrm>
+      </p:grpSpPr>
+      <p:sp>
+        <p:nvSpPr>
+          <p:cNvPr id="2" name="Title 1"/>
+          <p:cNvSpPr>
+            <a:spLocks noGrp="1"/>
+          </p:cNvSpPr>
+          <p:nvPr>
+            <p:ph type="title"/>
+          </p:nvPr>
+        </p:nvSpPr>
+        <p:spPr/>
+        <p:txBody>
+          <a:bodyPr/>
+          <a:lstStyle/>
+          <a:p>
+            <a:pPr lvl="0" indent="0" marL="0">
+              <a:buNone/>
+            </a:pPr>
+            <a:r>
+              <a:rPr/>
+              <a:t>Un partenariat simple entre la commune et les riverains</a:t>
+            </a:r>
+          </a:p>
+        </p:txBody>
+      </p:sp>
+      <p:sp>
+        <p:nvSpPr>
+          <p:cNvPr id="3" name="Content Placeholder 2"/>
+          <p:cNvSpPr>
+            <a:spLocks noGrp="1"/>
+          </p:cNvSpPr>
+          <p:nvPr>
+            <p:ph idx="1"/>
+          </p:nvPr>
+        </p:nvSpPr>
+        <p:spPr/>
+        <p:txBody>
+          <a:bodyPr/>
+          <a:lstStyle/>
+          <a:p>
+            <a:pPr lvl="0" indent="0" marL="0">
+              <a:buNone/>
+            </a:pPr>
+            <a:r>
+              <a:rPr b="1"/>
+              <a:t>Un dispositif communal de végétalisation des façades</a:t>
+            </a:r>
+          </a:p>
+          <a:p>
+            <a:pPr lvl="0"/>
+            <a:r>
+              <a:rPr/>
+              <a:t>Aide de la mairie pour la mise en place de fosses sur le domaine public.</a:t>
+            </a:r>
+          </a:p>
+          <a:p>
+            <a:pPr lvl="0"/>
+            <a:r>
+              <a:rPr/>
+              <a:t>Conseil technique sur le choix de la plante.</a:t>
+            </a:r>
+          </a:p>
+          <a:p>
+            <a:pPr lvl="0"/>
+            <a:r>
+              <a:rPr/>
+              <a:t>Éventuellement, fourniture du végétal à planter.</a:t>
+            </a:r>
+          </a:p>
+          <a:p>
+            <a:pPr lvl="0"/>
+            <a:r>
+              <a:rPr/>
+              <a:t>Engagement écrit du riverain pour l’entretien, la taille et l’arrosage.</a:t>
+            </a:r>
+          </a:p>
+        </p:txBody>
+      </p:sp>
+    </p:spTree>
+  </p:cSld>
+</p:sld>
+</file>
+
+<file path=ppt/slides/slide8.xml><?xml version="1.0" encoding="utf-8"?>
+<p:sld xmlns:a="http://schemas.openxmlformats.org/drawingml/2006/main" xmlns:r="http://schemas.openxmlformats.org/officeDocument/2006/relationships" xmlns:p="http://schemas.openxmlformats.org/presentationml/2006/main">
+  <p:cSld>
+    <p:spTree>
+      <p:nvGrpSpPr>
+        <p:cNvPr id="1" name=""/>
+        <p:cNvGrpSpPr/>
+        <p:nvPr/>
+      </p:nvGrpSpPr>
+      <p:grpSpPr>
+        <a:xfrm>
+          <a:off x="0" y="0"/>
+          <a:ext cx="0" cy="0"/>
+          <a:chOff x="0" y="0"/>
+          <a:chExt cx="0" cy="0"/>
+        </a:xfrm>
+      </p:grpSpPr>
+      <p:sp>
+        <p:nvSpPr>
+          <p:cNvPr id="2" name="Title 1"/>
+          <p:cNvSpPr>
+            <a:spLocks noGrp="1"/>
+          </p:cNvSpPr>
+          <p:nvPr>
+            <p:ph type="title"/>
+          </p:nvPr>
+        </p:nvSpPr>
+        <p:spPr/>
+        <p:txBody>
+          <a:bodyPr/>
+          <a:lstStyle/>
+          <a:p>
+            <a:pPr lvl="0" indent="0" marL="0">
+              <a:buNone/>
+            </a:pPr>
+            <a:r>
+              <a:rPr/>
+              <a:t>Faire connaître le projet</a:t>
+            </a:r>
+          </a:p>
+        </p:txBody>
+      </p:sp>
+      <p:sp>
+        <p:nvSpPr>
+          <p:cNvPr id="3" name="Content Placeholder 2"/>
+          <p:cNvSpPr>
+            <a:spLocks noGrp="1"/>
+          </p:cNvSpPr>
+          <p:nvPr>
+            <p:ph idx="1"/>
+          </p:nvPr>
+        </p:nvSpPr>
+        <p:spPr/>
+        <p:txBody>
+          <a:bodyPr/>
+          <a:lstStyle/>
+          <a:p>
+            <a:pPr lvl="0" indent="0" marL="0">
+              <a:buNone/>
+            </a:pPr>
+            <a:r>
+              <a:rPr b="1"/>
+              <a:t>Communication municipale</a:t>
+            </a:r>
+          </a:p>
+          <a:p>
+            <a:pPr lvl="0"/>
+            <a:r>
+              <a:rPr/>
+              <a:t>Affichage en mairie, sur panneaux.</a:t>
+            </a:r>
+          </a:p>
+          <a:p>
+            <a:pPr lvl="0"/>
+            <a:r>
+              <a:rPr/>
+              <a:t>Page dans IntraMuros</a:t>
+            </a:r>
+          </a:p>
+          <a:p>
+            <a:pPr lvl="0"/>
+            <a:r>
+              <a:rPr/>
+              <a:t>Réunion publique de démarrage.</a:t>
+            </a:r>
+          </a:p>
+          <a:p>
+            <a:pPr lvl="0"/>
+            <a:r>
+              <a:rPr/>
+              <a:t>Publication dans bulletin, avec convention à remplir en janvier.</a:t>
+            </a:r>
+          </a:p>
+          <a:p>
+            <a:pPr lvl="0"/>
+            <a:r>
+              <a:rPr/>
+              <a:t>Premier bilan dans bulletin en juillet.</a:t>
+            </a:r>
+          </a:p>
+        </p:txBody>
+      </p:sp>
+    </p:spTree>
+  </p:cSld>
+</p:sld>
+</file>
+
+<file path=ppt/slides/slide9.xml><?xml version="1.0" encoding="utf-8"?>
+<p:sld xmlns:a="http://schemas.openxmlformats.org/drawingml/2006/main" xmlns:r="http://schemas.openxmlformats.org/officeDocument/2006/relationships" xmlns:p="http://schemas.openxmlformats.org/presentationml/2006/main">
+  <p:cSld>
+    <p:spTree>
+      <p:nvGrpSpPr>
+        <p:cNvPr id="1" name=""/>
+        <p:cNvGrpSpPr/>
+        <p:nvPr/>
+      </p:nvGrpSpPr>
+      <p:grpSpPr>
+        <a:xfrm>
+          <a:off x="0" y="0"/>
+          <a:ext cx="0" cy="0"/>
+          <a:chOff x="0" y="0"/>
+          <a:chExt cx="0" cy="0"/>
+        </a:xfrm>
+      </p:grpSpPr>
+      <p:sp>
+        <p:nvSpPr>
+          <p:cNvPr id="2" name="Title 1"/>
+          <p:cNvSpPr>
+            <a:spLocks noGrp="1"/>
+          </p:cNvSpPr>
+          <p:nvPr>
+            <p:ph type="title"/>
+          </p:nvPr>
+        </p:nvSpPr>
+        <p:spPr/>
+        <p:txBody>
+          <a:bodyPr/>
+          <a:lstStyle/>
+          <a:p>
+            <a:pPr lvl="0" indent="0" marL="0">
+              <a:buNone/>
+            </a:pPr>
+            <a:r>
+              <a:rPr/>
               <a:t>Fosse de plantation pour pied de vigne en bordure de rue</a:t>
             </a:r>
           </a:p>
@@ -3302,1801 +5049,6 @@
             <a:r>
               <a:rPr/>
               <a:t>Fosse: réalisation</a:t>
-            </a:r>
-          </a:p>
-        </p:txBody>
-      </p:sp>
-    </p:spTree>
-  </p:cSld>
-</p:sld>
-</file>
-
-<file path=ppt/slides/slide11.xml><?xml version="1.0" encoding="utf-8"?>
-<p:sld xmlns:a="http://schemas.openxmlformats.org/drawingml/2006/main" xmlns:r="http://schemas.openxmlformats.org/officeDocument/2006/relationships" xmlns:p="http://schemas.openxmlformats.org/presentationml/2006/main">
-  <p:cSld>
-    <p:spTree>
-      <p:nvGrpSpPr>
-        <p:cNvPr id="1" name=""/>
-        <p:cNvGrpSpPr/>
-        <p:nvPr/>
-      </p:nvGrpSpPr>
-      <p:grpSpPr>
-        <a:xfrm>
-          <a:off x="0" y="0"/>
-          <a:ext cx="0" cy="0"/>
-          <a:chOff x="0" y="0"/>
-          <a:chExt cx="0" cy="0"/>
-        </a:xfrm>
-      </p:grpSpPr>
-      <p:sp>
-        <p:nvSpPr>
-          <p:cNvPr id="2" name="Title 1"/>
-          <p:cNvSpPr>
-            <a:spLocks noGrp="1"/>
-          </p:cNvSpPr>
-          <p:nvPr>
-            <p:ph type="title"/>
-          </p:nvPr>
-        </p:nvSpPr>
-        <p:spPr/>
-        <p:txBody>
-          <a:bodyPr/>
-          <a:lstStyle/>
-          <a:p>
-            <a:pPr lvl="0" indent="0" marL="0">
-              <a:buNone/>
-            </a:pPr>
-            <a:r>
-              <a:rPr/>
-              <a:t>Un parcours simple et rapide, compréhensible par tous</a:t>
-            </a:r>
-          </a:p>
-        </p:txBody>
-      </p:sp>
-      <p:sp>
-        <p:nvSpPr>
-          <p:cNvPr id="3" name="Content Placeholder 2"/>
-          <p:cNvSpPr>
-            <a:spLocks noGrp="1"/>
-          </p:cNvSpPr>
-          <p:nvPr>
-            <p:ph idx="1"/>
-          </p:nvPr>
-        </p:nvSpPr>
-        <p:spPr/>
-        <p:txBody>
-          <a:bodyPr/>
-          <a:lstStyle/>
-          <a:p>
-            <a:pPr lvl="0"/>
-            <a:r>
-              <a:rPr/>
-              <a:t>Le participant signe une convention (en ligne ou sur papier).</a:t>
-            </a:r>
-          </a:p>
-          <a:p>
-            <a:pPr lvl="0"/>
-            <a:r>
-              <a:rPr/>
-              <a:t>Un rendez-vous est pris avec un représentant de la mairie : les positions des fosses sont marquées à la bombe sur le trottoir, en fonction des contraintes et du végétal visé.</a:t>
-            </a:r>
-          </a:p>
-          <a:p>
-            <a:pPr lvl="0"/>
-            <a:r>
-              <a:rPr/>
-              <a:t>Les services municipaux mettent en place les fosses et plantent éventuellement les végétaux choisis.</a:t>
-            </a:r>
-          </a:p>
-        </p:txBody>
-      </p:sp>
-    </p:spTree>
-  </p:cSld>
-</p:sld>
-</file>
-
-<file path=ppt/slides/slide12.xml><?xml version="1.0" encoding="utf-8"?>
-<p:sld xmlns:a="http://schemas.openxmlformats.org/drawingml/2006/main" xmlns:r="http://schemas.openxmlformats.org/officeDocument/2006/relationships" xmlns:p="http://schemas.openxmlformats.org/presentationml/2006/main">
-  <p:cSld>
-    <p:spTree>
-      <p:nvGrpSpPr>
-        <p:cNvPr id="1" name=""/>
-        <p:cNvGrpSpPr/>
-        <p:nvPr/>
-      </p:nvGrpSpPr>
-      <p:grpSpPr>
-        <a:xfrm>
-          <a:off x="0" y="0"/>
-          <a:ext cx="0" cy="0"/>
-          <a:chOff x="0" y="0"/>
-          <a:chExt cx="0" cy="0"/>
-        </a:xfrm>
-      </p:grpSpPr>
-      <p:sp>
-        <p:nvSpPr>
-          <p:cNvPr id="2" name="Title 1"/>
-          <p:cNvSpPr>
-            <a:spLocks noGrp="1"/>
-          </p:cNvSpPr>
-          <p:nvPr>
-            <p:ph type="title"/>
-          </p:nvPr>
-        </p:nvSpPr>
-        <p:spPr/>
-        <p:txBody>
-          <a:bodyPr/>
-          <a:lstStyle/>
-          <a:p>
-            <a:pPr lvl="0" indent="0" marL="0">
-              <a:buNone/>
-            </a:pPr>
-            <a:r>
-              <a:rPr/>
-              <a:t>La « convention » avec les riverains</a:t>
-            </a:r>
-          </a:p>
-        </p:txBody>
-      </p:sp>
-      <p:sp>
-        <p:nvSpPr>
-          <p:cNvPr id="3" name="Content Placeholder 2"/>
-          <p:cNvSpPr>
-            <a:spLocks noGrp="1"/>
-          </p:cNvSpPr>
-          <p:nvPr>
-            <p:ph idx="1"/>
-          </p:nvPr>
-        </p:nvSpPr>
-        <p:spPr/>
-        <p:txBody>
-          <a:bodyPr/>
-          <a:lstStyle/>
-          <a:p>
-            <a:pPr lvl="0" indent="0" marL="0">
-              <a:buNone/>
-            </a:pPr>
-            <a:r>
-              <a:rPr/>
-              <a:t>Une convention décrit formalisée et simple les engagements de la mairie et des riverains. </a:t>
-            </a:r>
-            <a:r>
-              <a:rPr>
-                <a:hlinkClick r:id="rId2"/>
-              </a:rPr>
-              <a:t>convention</a:t>
-            </a:r>
-          </a:p>
-        </p:txBody>
-      </p:sp>
-    </p:spTree>
-  </p:cSld>
-</p:sld>
-</file>
-
-<file path=ppt/slides/slide13.xml><?xml version="1.0" encoding="utf-8"?>
-<p:sld xmlns:a="http://schemas.openxmlformats.org/drawingml/2006/main" xmlns:r="http://schemas.openxmlformats.org/officeDocument/2006/relationships" xmlns:p="http://schemas.openxmlformats.org/presentationml/2006/main">
-  <p:cSld>
-    <p:spTree>
-      <p:nvGrpSpPr>
-        <p:cNvPr id="1" name=""/>
-        <p:cNvGrpSpPr/>
-        <p:nvPr/>
-      </p:nvGrpSpPr>
-      <p:grpSpPr>
-        <a:xfrm>
-          <a:off x="0" y="0"/>
-          <a:ext cx="0" cy="0"/>
-          <a:chOff x="0" y="0"/>
-          <a:chExt cx="0" cy="0"/>
-        </a:xfrm>
-      </p:grpSpPr>
-      <p:sp>
-        <p:nvSpPr>
-          <p:cNvPr id="2" name="Title 1"/>
-          <p:cNvSpPr>
-            <a:spLocks noGrp="1"/>
-          </p:cNvSpPr>
-          <p:nvPr>
-            <p:ph type="title"/>
-          </p:nvPr>
-        </p:nvSpPr>
-        <p:spPr/>
-        <p:txBody>
-          <a:bodyPr/>
-          <a:lstStyle/>
-          <a:p>
-            <a:pPr lvl="0" indent="0" marL="0">
-              <a:buNone/>
-            </a:pPr>
-            <a:r>
-              <a:rPr/>
-              <a:t>Développement de la végétation en pied de façade</a:t>
-            </a:r>
-          </a:p>
-        </p:txBody>
-      </p:sp>
-      <p:pic>
-        <p:nvPicPr>
-          <p:cNvPr descr="images/fosse2.jpg" id="0" name="Picture 1"/>
-          <p:cNvPicPr>
-            <a:picLocks noGrp="1" noChangeAspect="1"/>
-          </p:cNvPicPr>
-          <p:nvPr/>
-        </p:nvPicPr>
-        <p:blipFill>
-          <a:blip r:embed="rId2"/>
-          <a:stretch>
-            <a:fillRect/>
-          </a:stretch>
-        </p:blipFill>
-        <p:spPr bwMode="auto">
-          <a:xfrm>
-            <a:off x="3784600" y="1193800"/>
-            <a:ext cx="1562100" cy="2882900"/>
-          </a:xfrm>
-          <a:prstGeom prst="rect">
-            <a:avLst/>
-          </a:prstGeom>
-          <a:noFill/>
-          <a:ln w="9525">
-            <a:noFill/>
-            <a:headEnd/>
-            <a:tailEnd/>
-          </a:ln>
-        </p:spPr>
-      </p:pic>
-      <p:sp>
-        <p:nvSpPr>
-          <p:cNvPr id="1" name="TextBox 3"/>
-          <p:cNvSpPr txBox="1"/>
-          <p:nvPr>
-            <p:ph idx="1"/>
-          </p:nvPr>
-        </p:nvSpPr>
-        <p:spPr>
-          <a:xfrm>
-            <a:off x="457200" y="4076700"/>
-            <a:ext cx="8229600" cy="508000"/>
-          </a:xfrm>
-          <a:prstGeom prst="rect">
-            <a:avLst/>
-          </a:prstGeom>
-          <a:noFill/>
-        </p:spPr>
-        <p:txBody>
-          <a:bodyPr/>
-          <a:lstStyle/>
-          <a:p>
-            <a:pPr lvl="0" indent="0" marL="0" algn="ctr">
-              <a:buNone/>
-            </a:pPr>
-            <a:r>
-              <a:rPr/>
-              <a:t>fosse</a:t>
-            </a:r>
-          </a:p>
-        </p:txBody>
-      </p:sp>
-    </p:spTree>
-  </p:cSld>
-</p:sld>
-</file>
-
-<file path=ppt/slides/slide14.xml><?xml version="1.0" encoding="utf-8"?>
-<p:sld xmlns:a="http://schemas.openxmlformats.org/drawingml/2006/main" xmlns:r="http://schemas.openxmlformats.org/officeDocument/2006/relationships" xmlns:p="http://schemas.openxmlformats.org/presentationml/2006/main">
-  <p:cSld>
-    <p:spTree>
-      <p:nvGrpSpPr>
-        <p:cNvPr id="1" name=""/>
-        <p:cNvGrpSpPr/>
-        <p:nvPr/>
-      </p:nvGrpSpPr>
-      <p:grpSpPr>
-        <a:xfrm>
-          <a:off x="0" y="0"/>
-          <a:ext cx="0" cy="0"/>
-          <a:chOff x="0" y="0"/>
-          <a:chExt cx="0" cy="0"/>
-        </a:xfrm>
-      </p:grpSpPr>
-      <p:sp>
-        <p:nvSpPr>
-          <p:cNvPr id="2" name="Title 1"/>
-          <p:cNvSpPr>
-            <a:spLocks noGrp="1"/>
-          </p:cNvSpPr>
-          <p:nvPr>
-            <p:ph type="title"/>
-          </p:nvPr>
-        </p:nvSpPr>
-        <p:spPr/>
-        <p:txBody>
-          <a:bodyPr/>
-          <a:lstStyle/>
-          <a:p>
-            <a:pPr lvl="0" indent="0" marL="0">
-              <a:buNone/>
-            </a:pPr>
-            <a:r>
-              <a:rPr/>
-              <a:t>Risques juridiques et points de vigilance</a:t>
-            </a:r>
-          </a:p>
-        </p:txBody>
-      </p:sp>
-      <p:sp>
-        <p:nvSpPr>
-          <p:cNvPr id="3" name="Content Placeholder 2"/>
-          <p:cNvSpPr>
-            <a:spLocks noGrp="1"/>
-          </p:cNvSpPr>
-          <p:nvPr>
-            <p:ph idx="1"/>
-          </p:nvPr>
-        </p:nvSpPr>
-        <p:spPr/>
-        <p:txBody>
-          <a:bodyPr/>
-          <a:lstStyle/>
-          <a:p>
-            <a:pPr lvl="0" indent="0" marL="0">
-              <a:buNone/>
-            </a:pPr>
-            <a:r>
-              <a:rPr b="1"/>
-              <a:t>Les travaux doivent être facilement réversibles</a:t>
-            </a:r>
-          </a:p>
-          <a:p>
-            <a:pPr lvl="0"/>
-            <a:r>
-              <a:rPr/>
-              <a:t>Sécurité des piétons et de la circulation.</a:t>
-            </a:r>
-          </a:p>
-          <a:p>
-            <a:pPr lvl="0"/>
-            <a:r>
-              <a:rPr/>
-              <a:t>Réseaux enterrés et contraintes techniques.</a:t>
-            </a:r>
-          </a:p>
-          <a:p>
-            <a:pPr lvl="0"/>
-            <a:r>
-              <a:rPr/>
-              <a:t>Remplacement éventuel des végétaux.</a:t>
-            </a:r>
-          </a:p>
-          <a:p>
-            <a:pPr lvl="0"/>
-            <a:r>
-              <a:rPr/>
-              <a:t>Risques de non-respect des engagements du riverain.</a:t>
-            </a:r>
-          </a:p>
-        </p:txBody>
-      </p:sp>
-    </p:spTree>
-  </p:cSld>
-</p:sld>
-</file>
-
-<file path=ppt/slides/slide15.xml><?xml version="1.0" encoding="utf-8"?>
-<p:sld xmlns:a="http://schemas.openxmlformats.org/drawingml/2006/main" xmlns:r="http://schemas.openxmlformats.org/officeDocument/2006/relationships" xmlns:p="http://schemas.openxmlformats.org/presentationml/2006/main">
-  <p:cSld>
-    <p:spTree>
-      <p:nvGrpSpPr>
-        <p:cNvPr id="1" name=""/>
-        <p:cNvGrpSpPr/>
-        <p:nvPr/>
-      </p:nvGrpSpPr>
-      <p:grpSpPr>
-        <a:xfrm>
-          <a:off x="0" y="0"/>
-          <a:ext cx="0" cy="0"/>
-          <a:chOff x="0" y="0"/>
-          <a:chExt cx="0" cy="0"/>
-        </a:xfrm>
-      </p:grpSpPr>
-      <p:sp>
-        <p:nvSpPr>
-          <p:cNvPr id="2" name="Title 1"/>
-          <p:cNvSpPr>
-            <a:spLocks noGrp="1"/>
-          </p:cNvSpPr>
-          <p:nvPr>
-            <p:ph type="title"/>
-          </p:nvPr>
-        </p:nvSpPr>
-        <p:spPr/>
-        <p:txBody>
-          <a:bodyPr/>
-          <a:lstStyle/>
-          <a:p>
-            <a:pPr lvl="0" indent="0" marL="0">
-              <a:buNone/>
-            </a:pPr>
-            <a:r>
-              <a:rPr/>
-              <a:t>Coût pris en charge par la mairie</a:t>
-            </a:r>
-          </a:p>
-        </p:txBody>
-      </p:sp>
-      <p:sp>
-        <p:nvSpPr>
-          <p:cNvPr id="3" name="Content Placeholder 2"/>
-          <p:cNvSpPr>
-            <a:spLocks noGrp="1"/>
-          </p:cNvSpPr>
-          <p:nvPr>
-            <p:ph idx="1"/>
-          </p:nvPr>
-        </p:nvSpPr>
-        <p:spPr/>
-        <p:txBody>
-          <a:bodyPr/>
-          <a:lstStyle/>
-          <a:p>
-            <a:pPr lvl="0" indent="0" marL="0">
-              <a:buNone/>
-            </a:pPr>
-            <a:r>
-              <a:rPr b="1"/>
-              <a:t>Un investissement ciblé et maîtrisé</a:t>
-            </a:r>
-          </a:p>
-          <a:p>
-            <a:pPr lvl="0"/>
-            <a:r>
-              <a:rPr/>
-              <a:t>La commune supporte le coût de la plantation.</a:t>
-            </a:r>
-          </a:p>
-          <a:p>
-            <a:pPr lvl="0"/>
-            <a:r>
-              <a:rPr/>
-              <a:t>Le budget couvre la création des fosses et les petits travaux associés.</a:t>
-            </a:r>
-          </a:p>
-          <a:p>
-            <a:pPr lvl="0"/>
-            <a:r>
-              <a:rPr/>
-              <a:t>Les habitants prennent en charge l’entretien (arrosage et taille).</a:t>
-            </a:r>
-          </a:p>
-        </p:txBody>
-      </p:sp>
-    </p:spTree>
-  </p:cSld>
-</p:sld>
-</file>
-
-<file path=ppt/slides/slide16.xml><?xml version="1.0" encoding="utf-8"?>
-<p:sld xmlns:a="http://schemas.openxmlformats.org/drawingml/2006/main" xmlns:r="http://schemas.openxmlformats.org/officeDocument/2006/relationships" xmlns:p="http://schemas.openxmlformats.org/presentationml/2006/main">
-  <p:cSld>
-    <p:spTree>
-      <p:nvGrpSpPr>
-        <p:cNvPr id="1" name=""/>
-        <p:cNvGrpSpPr/>
-        <p:nvPr/>
-      </p:nvGrpSpPr>
-      <p:grpSpPr>
-        <a:xfrm>
-          <a:off x="0" y="0"/>
-          <a:ext cx="0" cy="0"/>
-          <a:chOff x="0" y="0"/>
-          <a:chExt cx="0" cy="0"/>
-        </a:xfrm>
-      </p:grpSpPr>
-      <p:sp>
-        <p:nvSpPr>
-          <p:cNvPr id="2" name="Title 1"/>
-          <p:cNvSpPr>
-            <a:spLocks noGrp="1"/>
-          </p:cNvSpPr>
-          <p:nvPr>
-            <p:ph type="title"/>
-          </p:nvPr>
-        </p:nvSpPr>
-        <p:spPr/>
-        <p:txBody>
-          <a:bodyPr/>
-          <a:lstStyle/>
-          <a:p>
-            <a:pPr lvl="0" indent="0" marL="0">
-              <a:buNone/>
-            </a:pPr>
-            <a:r>
-              <a:rPr/>
-              <a:t>Suivi et évaluation</a:t>
-            </a:r>
-          </a:p>
-        </p:txBody>
-      </p:sp>
-      <p:sp>
-        <p:nvSpPr>
-          <p:cNvPr id="3" name="Content Placeholder 2"/>
-          <p:cNvSpPr>
-            <a:spLocks noGrp="1"/>
-          </p:cNvSpPr>
-          <p:nvPr>
-            <p:ph idx="1"/>
-          </p:nvPr>
-        </p:nvSpPr>
-        <p:spPr/>
-        <p:txBody>
-          <a:bodyPr/>
-          <a:lstStyle/>
-          <a:p>
-            <a:pPr lvl="0" indent="0" marL="0">
-              <a:buNone/>
-            </a:pPr>
-            <a:r>
-              <a:rPr b="1"/>
-              <a:t>Mesurer simplement les résultats</a:t>
-            </a:r>
-          </a:p>
-          <a:p>
-            <a:pPr lvl="0"/>
-            <a:r>
-              <a:rPr/>
-              <a:t>Nombre de volontaires.</a:t>
-            </a:r>
-          </a:p>
-          <a:p>
-            <a:pPr lvl="0"/>
-            <a:r>
-              <a:rPr/>
-              <a:t>Nombre de fosses créées.</a:t>
-            </a:r>
-          </a:p>
-          <a:p>
-            <a:pPr lvl="0"/>
-            <a:r>
-              <a:rPr/>
-              <a:t>Taux d’échec (pas d’entretien).</a:t>
-            </a:r>
-          </a:p>
-          <a:p>
-            <a:pPr lvl="0"/>
-            <a:r>
-              <a:rPr/>
-              <a:t>Satisfaction des habitants.</a:t>
-            </a:r>
-          </a:p>
-        </p:txBody>
-      </p:sp>
-    </p:spTree>
-  </p:cSld>
-</p:sld>
-</file>
-
-<file path=ppt/slides/slide17.xml><?xml version="1.0" encoding="utf-8"?>
-<p:sld xmlns:a="http://schemas.openxmlformats.org/drawingml/2006/main" xmlns:r="http://schemas.openxmlformats.org/officeDocument/2006/relationships" xmlns:p="http://schemas.openxmlformats.org/presentationml/2006/main">
-  <p:cSld>
-    <p:spTree>
-      <p:nvGrpSpPr>
-        <p:cNvPr id="1" name=""/>
-        <p:cNvGrpSpPr/>
-        <p:nvPr/>
-      </p:nvGrpSpPr>
-      <p:grpSpPr>
-        <a:xfrm>
-          <a:off x="0" y="0"/>
-          <a:ext cx="0" cy="0"/>
-          <a:chOff x="0" y="0"/>
-          <a:chExt cx="0" cy="0"/>
-        </a:xfrm>
-      </p:grpSpPr>
-      <p:sp>
-        <p:nvSpPr>
-          <p:cNvPr id="2" name="Title 1"/>
-          <p:cNvSpPr>
-            <a:spLocks noGrp="1"/>
-          </p:cNvSpPr>
-          <p:nvPr>
-            <p:ph type="title"/>
-          </p:nvPr>
-        </p:nvSpPr>
-        <p:spPr/>
-        <p:txBody>
-          <a:bodyPr/>
-          <a:lstStyle/>
-          <a:p>
-            <a:pPr lvl="0" indent="0" marL="0">
-              <a:buNone/>
-            </a:pPr>
-            <a:r>
-              <a:rPr/>
-              <a:t>Ce que le conseil municipal doit approuver</a:t>
-            </a:r>
-          </a:p>
-        </p:txBody>
-      </p:sp>
-      <p:sp>
-        <p:nvSpPr>
-          <p:cNvPr id="3" name="Content Placeholder 2"/>
-          <p:cNvSpPr>
-            <a:spLocks noGrp="1"/>
-          </p:cNvSpPr>
-          <p:nvPr>
-            <p:ph idx="1"/>
-          </p:nvPr>
-        </p:nvSpPr>
-        <p:spPr/>
-        <p:txBody>
-          <a:bodyPr/>
-          <a:lstStyle/>
-          <a:p>
-            <a:pPr lvl="0"/>
-            <a:r>
-              <a:rPr/>
-              <a:t>Le principe du programme.</a:t>
-            </a:r>
-          </a:p>
-          <a:p>
-            <a:pPr lvl="0"/>
-            <a:r>
-              <a:rPr/>
-              <a:t>La prise en charge par la mairie du coût des fosses.</a:t>
-            </a:r>
-          </a:p>
-          <a:p>
-            <a:pPr lvl="0"/>
-            <a:r>
-              <a:rPr/>
-              <a:t>La convention qui sera proposée.</a:t>
-            </a:r>
-          </a:p>
-          <a:p>
-            <a:pPr lvl="0"/>
-            <a:r>
-              <a:rPr/>
-              <a:t>L’achat de 100 pieds de jasmins et 100 pieds de chevrefeuille (10 Euros par pied).</a:t>
-            </a:r>
-          </a:p>
-        </p:txBody>
-      </p:sp>
-    </p:spTree>
-  </p:cSld>
-</p:sld>
-</file>
-
-<file path=ppt/slides/slide18.xml><?xml version="1.0" encoding="utf-8"?>
-<p:sld xmlns:a="http://schemas.openxmlformats.org/drawingml/2006/main" xmlns:r="http://schemas.openxmlformats.org/officeDocument/2006/relationships" xmlns:p="http://schemas.openxmlformats.org/presentationml/2006/main">
-  <p:cSld>
-    <p:spTree>
-      <p:nvGrpSpPr>
-        <p:cNvPr id="1" name=""/>
-        <p:cNvGrpSpPr/>
-        <p:nvPr/>
-      </p:nvGrpSpPr>
-      <p:grpSpPr>
-        <a:xfrm>
-          <a:off x="0" y="0"/>
-          <a:ext cx="0" cy="0"/>
-          <a:chOff x="0" y="0"/>
-          <a:chExt cx="0" cy="0"/>
-        </a:xfrm>
-      </p:grpSpPr>
-      <p:sp>
-        <p:nvSpPr>
-          <p:cNvPr id="2" name="Title 1"/>
-          <p:cNvSpPr>
-            <a:spLocks noGrp="1"/>
-          </p:cNvSpPr>
-          <p:nvPr>
-            <p:ph type="title"/>
-          </p:nvPr>
-        </p:nvSpPr>
-        <p:spPr/>
-        <p:txBody>
-          <a:bodyPr/>
-          <a:lstStyle/>
-          <a:p>
-            <a:pPr lvl="0" indent="0" marL="0">
-              <a:buNone/>
-            </a:pPr>
-            <a:r>
-              <a:rPr/>
-              <a:t>Planning</a:t>
-            </a:r>
-          </a:p>
-        </p:txBody>
-      </p:sp>
-      <p:sp>
-        <p:nvSpPr>
-          <p:cNvPr id="3" name="Content Placeholder 2"/>
-          <p:cNvSpPr>
-            <a:spLocks noGrp="1"/>
-          </p:cNvSpPr>
-          <p:nvPr>
-            <p:ph idx="1"/>
-          </p:nvPr>
-        </p:nvSpPr>
-        <p:spPr/>
-        <p:txBody>
-          <a:bodyPr/>
-          <a:lstStyle/>
-          <a:p>
-            <a:pPr lvl="0" indent="0" marL="0">
-              <a:buNone/>
-            </a:pPr>
-            <a:r>
-              <a:rPr b="1"/>
-              <a:t>Pour viser un deploiement Printemps 2027</a:t>
-            </a:r>
-          </a:p>
-          <a:p>
-            <a:pPr lvl="0"/>
-            <a:r>
-              <a:rPr/>
-              <a:t>Approbation par le conseil municipal : Octobre 2026</a:t>
-            </a:r>
-          </a:p>
-          <a:p>
-            <a:pPr lvl="0"/>
-            <a:r>
-              <a:rPr/>
-              <a:t>Réunion public fin 2026</a:t>
-            </a:r>
-          </a:p>
-          <a:p>
-            <a:pPr lvl="0"/>
-            <a:r>
-              <a:rPr/>
-              <a:t>Bulletin municipal : bouclage octobre 2026, parution Janvier 2027</a:t>
-            </a:r>
-          </a:p>
-          <a:p>
-            <a:pPr lvl="0"/>
-            <a:r>
-              <a:rPr/>
-              <a:t>Mise en place des fosses : Hiver/Printemps 2027</a:t>
-            </a:r>
-          </a:p>
-        </p:txBody>
-      </p:sp>
-    </p:spTree>
-  </p:cSld>
-</p:sld>
-</file>
-
-<file path=ppt/slides/slide19.xml><?xml version="1.0" encoding="utf-8"?>
-<p:sld xmlns:a="http://schemas.openxmlformats.org/drawingml/2006/main" xmlns:r="http://schemas.openxmlformats.org/officeDocument/2006/relationships" xmlns:p="http://schemas.openxmlformats.org/presentationml/2006/main">
-  <p:cSld>
-    <p:spTree>
-      <p:nvGrpSpPr>
-        <p:cNvPr id="1" name=""/>
-        <p:cNvGrpSpPr/>
-        <p:nvPr/>
-      </p:nvGrpSpPr>
-      <p:grpSpPr>
-        <a:xfrm>
-          <a:off x="0" y="0"/>
-          <a:ext cx="0" cy="0"/>
-          <a:chOff x="0" y="0"/>
-          <a:chExt cx="0" cy="0"/>
-        </a:xfrm>
-      </p:grpSpPr>
-      <p:sp>
-        <p:nvSpPr>
-          <p:cNvPr id="2" name="Title 1"/>
-          <p:cNvSpPr>
-            <a:spLocks noGrp="1"/>
-          </p:cNvSpPr>
-          <p:nvPr>
-            <p:ph type="title"/>
-          </p:nvPr>
-        </p:nvSpPr>
-        <p:spPr/>
-        <p:txBody>
-          <a:bodyPr/>
-          <a:lstStyle/>
-          <a:p>
-            <a:pPr lvl="0" indent="0" marL="0">
-              <a:buNone/>
-            </a:pPr>
-            <a:r>
-              <a:rPr/>
-              <a:t>Conclusion</a:t>
-            </a:r>
-          </a:p>
-        </p:txBody>
-      </p:sp>
-      <p:sp>
-        <p:nvSpPr>
-          <p:cNvPr id="3" name="Content Placeholder 2"/>
-          <p:cNvSpPr>
-            <a:spLocks noGrp="1"/>
-          </p:cNvSpPr>
-          <p:nvPr>
-            <p:ph idx="1"/>
-          </p:nvPr>
-        </p:nvSpPr>
-        <p:spPr/>
-        <p:txBody>
-          <a:bodyPr/>
-          <a:lstStyle/>
-          <a:p>
-            <a:pPr lvl="0" indent="0" marL="0">
-              <a:buNone/>
-            </a:pPr>
-            <a:r>
-              <a:rPr b="1"/>
-              <a:t>Un projet simple, utile et fédérateur</a:t>
-            </a:r>
-          </a:p>
-          <a:p>
-            <a:pPr lvl="0"/>
-            <a:r>
-              <a:rPr/>
-              <a:t>Ce programme permet d’agir vite, à coût maîtrisé, avec les habitants, pour adapter le village aux canicules.</a:t>
-            </a:r>
-          </a:p>
-          <a:p>
-            <a:pPr lvl="0"/>
-            <a:r>
-              <a:rPr/>
-              <a:t>Les vrais bénéfices apparaîtront 2 ou 3 ans après le lancement, le temps que les végétaux poussent.</a:t>
-            </a:r>
-          </a:p>
-          <a:p>
-            <a:pPr lvl="0"/>
-            <a:r>
-              <a:rPr/>
-              <a:t>Un facteur clé de succès : Le portage et la mobilisation des élus.</a:t>
-            </a:r>
-          </a:p>
-        </p:txBody>
-      </p:sp>
-    </p:spTree>
-  </p:cSld>
-</p:sld>
-</file>
-
-<file path=ppt/slides/slide2.xml><?xml version="1.0" encoding="utf-8"?>
-<p:sld xmlns:a="http://schemas.openxmlformats.org/drawingml/2006/main" xmlns:r="http://schemas.openxmlformats.org/officeDocument/2006/relationships" xmlns:p="http://schemas.openxmlformats.org/presentationml/2006/main">
-  <p:cSld>
-    <p:spTree>
-      <p:nvGrpSpPr>
-        <p:cNvPr id="1" name=""/>
-        <p:cNvGrpSpPr/>
-        <p:nvPr/>
-      </p:nvGrpSpPr>
-      <p:grpSpPr>
-        <a:xfrm>
-          <a:off x="0" y="0"/>
-          <a:ext cx="0" cy="0"/>
-          <a:chOff x="0" y="0"/>
-          <a:chExt cx="0" cy="0"/>
-        </a:xfrm>
-      </p:grpSpPr>
-      <p:sp>
-        <p:nvSpPr>
-          <p:cNvPr id="2" name="Title 1"/>
-          <p:cNvSpPr>
-            <a:spLocks noGrp="1"/>
-          </p:cNvSpPr>
-          <p:nvPr>
-            <p:ph type="title"/>
-          </p:nvPr>
-        </p:nvSpPr>
-        <p:spPr/>
-        <p:txBody>
-          <a:bodyPr/>
-          <a:lstStyle/>
-          <a:p>
-            <a:pPr lvl="0" indent="0" marL="0">
-              <a:buNone/>
-            </a:pPr>
-            <a:r>
-              <a:rPr/>
-              <a:t>Rue Cariben Avant/Après</a:t>
-            </a:r>
-          </a:p>
-        </p:txBody>
-      </p:sp>
-    </p:spTree>
-  </p:cSld>
-</p:sld>
-</file>
-
-<file path=ppt/slides/slide20.xml><?xml version="1.0" encoding="utf-8"?>
-<p:sld xmlns:a="http://schemas.openxmlformats.org/drawingml/2006/main" xmlns:r="http://schemas.openxmlformats.org/officeDocument/2006/relationships" xmlns:p="http://schemas.openxmlformats.org/presentationml/2006/main">
-  <p:cSld>
-    <p:spTree>
-      <p:nvGrpSpPr>
-        <p:cNvPr id="1" name=""/>
-        <p:cNvGrpSpPr/>
-        <p:nvPr/>
-      </p:nvGrpSpPr>
-      <p:grpSpPr>
-        <a:xfrm>
-          <a:off x="0" y="0"/>
-          <a:ext cx="0" cy="0"/>
-          <a:chOff x="0" y="0"/>
-          <a:chExt cx="0" cy="0"/>
-        </a:xfrm>
-      </p:grpSpPr>
-      <p:sp>
-        <p:nvSpPr>
-          <p:cNvPr id="2" name="Title 1"/>
-          <p:cNvSpPr>
-            <a:spLocks noGrp="1"/>
-          </p:cNvSpPr>
-          <p:nvPr>
-            <p:ph type="title"/>
-          </p:nvPr>
-        </p:nvSpPr>
-        <p:spPr/>
-        <p:txBody>
-          <a:bodyPr/>
-          <a:lstStyle/>
-          <a:p>
-            <a:pPr lvl="0" indent="0" marL="0">
-              <a:buNone/>
-            </a:pPr>
-            <a:r>
-              <a:rPr/>
-              <a:t>Avant / Après</a:t>
-            </a:r>
-          </a:p>
-        </p:txBody>
-      </p:sp>
-      <p:pic>
-        <p:nvPicPr>
-          <p:cNvPr descr="images/rue_4_s.jpg" id="0" name="Picture 1"/>
-          <p:cNvPicPr>
-            <a:picLocks noGrp="1" noChangeAspect="1"/>
-          </p:cNvPicPr>
-          <p:nvPr/>
-        </p:nvPicPr>
-        <p:blipFill>
-          <a:blip r:embed="rId2"/>
-          <a:stretch>
-            <a:fillRect/>
-          </a:stretch>
-        </p:blipFill>
-        <p:spPr bwMode="auto">
-          <a:xfrm>
-            <a:off x="2311400" y="1193800"/>
-            <a:ext cx="4533900" cy="2882900"/>
-          </a:xfrm>
-          <a:prstGeom prst="rect">
-            <a:avLst/>
-          </a:prstGeom>
-          <a:noFill/>
-          <a:ln w="9525">
-            <a:noFill/>
-            <a:headEnd/>
-            <a:tailEnd/>
-          </a:ln>
-        </p:spPr>
-      </p:pic>
-      <p:sp>
-        <p:nvSpPr>
-          <p:cNvPr id="1" name="TextBox 3"/>
-          <p:cNvSpPr txBox="1"/>
-          <p:nvPr>
-            <p:ph idx="1"/>
-          </p:nvPr>
-        </p:nvSpPr>
-        <p:spPr>
-          <a:xfrm>
-            <a:off x="457200" y="4076700"/>
-            <a:ext cx="8229600" cy="508000"/>
-          </a:xfrm>
-          <a:prstGeom prst="rect">
-            <a:avLst/>
-          </a:prstGeom>
-          <a:noFill/>
-        </p:spPr>
-        <p:txBody>
-          <a:bodyPr/>
-          <a:lstStyle/>
-          <a:p>
-            <a:pPr lvl="0" indent="0" marL="0" algn="ctr">
-              <a:buNone/>
-            </a:pPr>
-            <a:r>
-              <a:rPr/>
-              <a:t>Exemples de végétalisation</a:t>
-            </a:r>
-          </a:p>
-        </p:txBody>
-      </p:sp>
-    </p:spTree>
-  </p:cSld>
-</p:sld>
-</file>
-
-<file path=ppt/slides/slide21.xml><?xml version="1.0" encoding="utf-8"?>
-<p:sld xmlns:a="http://schemas.openxmlformats.org/drawingml/2006/main" xmlns:r="http://schemas.openxmlformats.org/officeDocument/2006/relationships" xmlns:p="http://schemas.openxmlformats.org/presentationml/2006/main">
-  <p:cSld>
-    <p:spTree>
-      <p:nvGrpSpPr>
-        <p:cNvPr id="1" name=""/>
-        <p:cNvGrpSpPr/>
-        <p:nvPr/>
-      </p:nvGrpSpPr>
-      <p:grpSpPr>
-        <a:xfrm>
-          <a:off x="0" y="0"/>
-          <a:ext cx="0" cy="0"/>
-          <a:chOff x="0" y="0"/>
-          <a:chExt cx="0" cy="0"/>
-        </a:xfrm>
-      </p:grpSpPr>
-      <p:sp>
-        <p:nvSpPr>
-          <p:cNvPr id="2" name="Title 1"/>
-          <p:cNvSpPr>
-            <a:spLocks noGrp="1"/>
-          </p:cNvSpPr>
-          <p:nvPr>
-            <p:ph type="title"/>
-          </p:nvPr>
-        </p:nvSpPr>
-        <p:spPr/>
-        <p:txBody>
-          <a:bodyPr/>
-          <a:lstStyle/>
-          <a:p>
-            <a:pPr lvl="0" indent="0" marL="0">
-              <a:buNone/>
-            </a:pPr>
-            <a:r>
-              <a:rPr/>
-              <a:t>A développer</a:t>
-            </a:r>
-          </a:p>
-        </p:txBody>
-      </p:sp>
-      <p:sp>
-        <p:nvSpPr>
-          <p:cNvPr id="3" name="Content Placeholder 2"/>
-          <p:cNvSpPr>
-            <a:spLocks noGrp="1"/>
-          </p:cNvSpPr>
-          <p:nvPr>
-            <p:ph idx="1"/>
-          </p:nvPr>
-        </p:nvSpPr>
-        <p:spPr/>
-        <p:txBody>
-          <a:bodyPr/>
-          <a:lstStyle/>
-          <a:p>
-            <a:pPr lvl="0"/>
-            <a:r>
-              <a:rPr/>
-              <a:t>Zone pavillonnaire : végétaliser les bords de route.</a:t>
-            </a:r>
-          </a:p>
-          <a:p>
-            <a:pPr lvl="0"/>
-            <a:r>
-              <a:rPr/>
-              <a:t>Relations et contacts avec ABF et autres organismes officiels (CAUE 82).</a:t>
-            </a:r>
-          </a:p>
-          <a:p>
-            <a:pPr lvl="0"/>
-            <a:r>
-              <a:rPr/>
-              <a:t>Aides au financement : “Le Fonds vert” (État) , “Ma Solution pour le Climat” (Région)</a:t>
-            </a:r>
-          </a:p>
-        </p:txBody>
-      </p:sp>
-    </p:spTree>
-  </p:cSld>
-</p:sld>
-</file>
-
-<file path=ppt/slides/slide3.xml><?xml version="1.0" encoding="utf-8"?>
-<p:sld xmlns:a="http://schemas.openxmlformats.org/drawingml/2006/main" xmlns:r="http://schemas.openxmlformats.org/officeDocument/2006/relationships" xmlns:p="http://schemas.openxmlformats.org/presentationml/2006/main">
-  <p:cSld>
-    <p:spTree>
-      <p:nvGrpSpPr>
-        <p:cNvPr id="1" name=""/>
-        <p:cNvGrpSpPr/>
-        <p:nvPr/>
-      </p:nvGrpSpPr>
-      <p:grpSpPr>
-        <a:xfrm>
-          <a:off x="0" y="0"/>
-          <a:ext cx="0" cy="0"/>
-          <a:chOff x="0" y="0"/>
-          <a:chExt cx="0" cy="0"/>
-        </a:xfrm>
-      </p:grpSpPr>
-      <p:sp>
-        <p:nvSpPr>
-          <p:cNvPr id="2" name="Title 1"/>
-          <p:cNvSpPr>
-            <a:spLocks noGrp="1"/>
-          </p:cNvSpPr>
-          <p:nvPr>
-            <p:ph type="title"/>
-          </p:nvPr>
-        </p:nvSpPr>
-        <p:spPr/>
-        <p:txBody>
-          <a:bodyPr/>
-          <a:lstStyle/>
-          <a:p>
-            <a:pPr lvl="0" indent="0" marL="0">
-              <a:buNone/>
-            </a:pPr>
-            <a:r>
-              <a:rPr/>
-              <a:t>Pourquoi végétaliser ?</a:t>
-            </a:r>
-          </a:p>
-        </p:txBody>
-      </p:sp>
-      <p:sp>
-        <p:nvSpPr>
-          <p:cNvPr id="3" name="Content Placeholder 2"/>
-          <p:cNvSpPr>
-            <a:spLocks noGrp="1"/>
-          </p:cNvSpPr>
-          <p:nvPr>
-            <p:ph idx="1"/>
-          </p:nvPr>
-        </p:nvSpPr>
-        <p:spPr/>
-        <p:txBody>
-          <a:bodyPr/>
-          <a:lstStyle/>
-          <a:p>
-            <a:pPr lvl="0" indent="0" marL="0">
-              <a:buNone/>
-            </a:pPr>
-            <a:r>
-              <a:rPr b="1"/>
-              <a:t>Adapter le village à la succession de canicules </a:t>
-            </a:r>
-          </a:p>
-          <a:p>
-            <a:pPr lvl="0"/>
-            <a:r>
-              <a:rPr/>
-              <a:t>Réduire la température des façades de </a:t>
-            </a:r>
-            <a:r>
-              <a:rPr b="1"/>
-              <a:t>4 à 6 °C</a:t>
-            </a:r>
-            <a:r>
-              <a:rPr/>
-              <a:t>.</a:t>
-            </a:r>
-          </a:p>
-          <a:p>
-            <a:pPr lvl="0"/>
-            <a:r>
-              <a:rPr/>
-              <a:t>Améliorer le confort d’été des riverains et des passants.</a:t>
-            </a:r>
-          </a:p>
-          <a:p>
-            <a:pPr lvl="0"/>
-            <a:r>
-              <a:rPr/>
-              <a:t>Permettre aux riverains, sous le contrôle de la mairie, de planter sur les trottoirs: Il est normalement interdit de modifier le domaine public.</a:t>
-            </a:r>
-          </a:p>
-          <a:p>
-            <a:pPr lvl="0"/>
-            <a:r>
-              <a:rPr/>
-              <a:t>Agir : ne plus subir son environnement.</a:t>
-            </a:r>
-          </a:p>
-        </p:txBody>
-      </p:sp>
-    </p:spTree>
-  </p:cSld>
-</p:sld>
-</file>
-
-<file path=ppt/slides/slide4.xml><?xml version="1.0" encoding="utf-8"?>
-<p:sld xmlns:a="http://schemas.openxmlformats.org/drawingml/2006/main" xmlns:r="http://schemas.openxmlformats.org/officeDocument/2006/relationships" xmlns:p="http://schemas.openxmlformats.org/presentationml/2006/main">
-  <p:cSld>
-    <p:spTree>
-      <p:nvGrpSpPr>
-        <p:cNvPr id="1" name=""/>
-        <p:cNvGrpSpPr/>
-        <p:nvPr/>
-      </p:nvGrpSpPr>
-      <p:grpSpPr>
-        <a:xfrm>
-          <a:off x="0" y="0"/>
-          <a:ext cx="0" cy="0"/>
-          <a:chOff x="0" y="0"/>
-          <a:chExt cx="0" cy="0"/>
-        </a:xfrm>
-      </p:grpSpPr>
-      <p:sp>
-        <p:nvSpPr>
-          <p:cNvPr id="2" name="Title 1"/>
-          <p:cNvSpPr>
-            <a:spLocks noGrp="1"/>
-          </p:cNvSpPr>
-          <p:nvPr>
-            <p:ph type="title"/>
-          </p:nvPr>
-        </p:nvSpPr>
-        <p:spPr/>
-        <p:txBody>
-          <a:bodyPr/>
-          <a:lstStyle/>
-          <a:p>
-            <a:pPr lvl="0" indent="0" marL="0">
-              <a:buNone/>
-            </a:pPr>
-            <a:r>
-              <a:rPr/>
-              <a:t>Comment végétaliser le village</a:t>
-            </a:r>
-          </a:p>
-        </p:txBody>
-      </p:sp>
-      <p:sp>
-        <p:nvSpPr>
-          <p:cNvPr id="3" name="Content Placeholder 2"/>
-          <p:cNvSpPr>
-            <a:spLocks noGrp="1"/>
-          </p:cNvSpPr>
-          <p:nvPr>
-            <p:ph idx="1"/>
-          </p:nvPr>
-        </p:nvSpPr>
-        <p:spPr/>
-        <p:txBody>
-          <a:bodyPr/>
-          <a:lstStyle/>
-          <a:p>
-            <a:pPr lvl="0"/>
-            <a:r>
-              <a:rPr b="1"/>
-              <a:t>La mairie n’a pas les moyens d’entretenir des plantations en nombre</a:t>
-            </a:r>
-          </a:p>
-          <a:p>
-            <a:pPr lvl="0"/>
-            <a:r>
-              <a:rPr b="1"/>
-              <a:t>Pour avoir des résultats rapides et massifs, il faut associer les habitants</a:t>
-            </a:r>
-          </a:p>
-          <a:p>
-            <a:pPr lvl="0"/>
-            <a:r>
-              <a:rPr i="1"/>
-              <a:t>La commune crée des fosses de plantation sur le domaine public.</a:t>
-            </a:r>
-          </a:p>
-          <a:p>
-            <a:pPr lvl="0"/>
-            <a:r>
-              <a:rPr i="1"/>
-              <a:t>Les habitants s’occupent des végétaux : arrosage, taille, soins.</a:t>
-            </a:r>
-          </a:p>
-        </p:txBody>
-      </p:sp>
-    </p:spTree>
-  </p:cSld>
-</p:sld>
-</file>
-
-<file path=ppt/slides/slide5.xml><?xml version="1.0" encoding="utf-8"?>
-<p:sld xmlns:a="http://schemas.openxmlformats.org/drawingml/2006/main" xmlns:r="http://schemas.openxmlformats.org/officeDocument/2006/relationships" xmlns:p="http://schemas.openxmlformats.org/presentationml/2006/main">
-  <p:cSld>
-    <p:spTree>
-      <p:nvGrpSpPr>
-        <p:cNvPr id="1" name=""/>
-        <p:cNvGrpSpPr/>
-        <p:nvPr/>
-      </p:nvGrpSpPr>
-      <p:grpSpPr>
-        <a:xfrm>
-          <a:off x="0" y="0"/>
-          <a:ext cx="0" cy="0"/>
-          <a:chOff x="0" y="0"/>
-          <a:chExt cx="0" cy="0"/>
-        </a:xfrm>
-      </p:grpSpPr>
-      <p:sp>
-        <p:nvSpPr>
-          <p:cNvPr id="2" name="Title 1"/>
-          <p:cNvSpPr>
-            <a:spLocks noGrp="1"/>
-          </p:cNvSpPr>
-          <p:nvPr>
-            <p:ph type="title"/>
-          </p:nvPr>
-        </p:nvSpPr>
-        <p:spPr/>
-        <p:txBody>
-          <a:bodyPr/>
-          <a:lstStyle/>
-          <a:p>
-            <a:pPr lvl="0" indent="0" marL="0">
-              <a:buNone/>
-            </a:pPr>
-            <a:r>
-              <a:rPr/>
-              <a:t>Avant / Après</a:t>
-            </a:r>
-          </a:p>
-        </p:txBody>
-      </p:sp>
-      <p:pic>
-        <p:nvPicPr>
-          <p:cNvPr descr="images/rue_3_s.jpg" id="0" name="Picture 1"/>
-          <p:cNvPicPr>
-            <a:picLocks noGrp="1" noChangeAspect="1"/>
-          </p:cNvPicPr>
-          <p:nvPr/>
-        </p:nvPicPr>
-        <p:blipFill>
-          <a:blip r:embed="rId2"/>
-          <a:stretch>
-            <a:fillRect/>
-          </a:stretch>
-        </p:blipFill>
-        <p:spPr bwMode="auto">
-          <a:xfrm>
-            <a:off x="3581400" y="1193800"/>
-            <a:ext cx="1993900" cy="2882900"/>
-          </a:xfrm>
-          <a:prstGeom prst="rect">
-            <a:avLst/>
-          </a:prstGeom>
-          <a:noFill/>
-          <a:ln w="9525">
-            <a:noFill/>
-            <a:headEnd/>
-            <a:tailEnd/>
-          </a:ln>
-        </p:spPr>
-      </p:pic>
-      <p:sp>
-        <p:nvSpPr>
-          <p:cNvPr id="1" name="TextBox 3"/>
-          <p:cNvSpPr txBox="1"/>
-          <p:nvPr>
-            <p:ph idx="1"/>
-          </p:nvPr>
-        </p:nvSpPr>
-        <p:spPr>
-          <a:xfrm>
-            <a:off x="457200" y="4076700"/>
-            <a:ext cx="8229600" cy="508000"/>
-          </a:xfrm>
-          <a:prstGeom prst="rect">
-            <a:avLst/>
-          </a:prstGeom>
-          <a:noFill/>
-        </p:spPr>
-        <p:txBody>
-          <a:bodyPr/>
-          <a:lstStyle/>
-          <a:p>
-            <a:pPr lvl="0" indent="0" marL="0" algn="ctr">
-              <a:buNone/>
-            </a:pPr>
-            <a:r>
-              <a:rPr/>
-              <a:t>Exemples de végétalisation dans les ruelles</a:t>
-            </a:r>
-          </a:p>
-        </p:txBody>
-      </p:sp>
-    </p:spTree>
-  </p:cSld>
-</p:sld>
-</file>
-
-<file path=ppt/slides/slide6.xml><?xml version="1.0" encoding="utf-8"?>
-<p:sld xmlns:a="http://schemas.openxmlformats.org/drawingml/2006/main" xmlns:r="http://schemas.openxmlformats.org/officeDocument/2006/relationships" xmlns:p="http://schemas.openxmlformats.org/presentationml/2006/main">
-  <p:cSld>
-    <p:spTree>
-      <p:nvGrpSpPr>
-        <p:cNvPr id="1" name=""/>
-        <p:cNvGrpSpPr/>
-        <p:nvPr/>
-      </p:nvGrpSpPr>
-      <p:grpSpPr>
-        <a:xfrm>
-          <a:off x="0" y="0"/>
-          <a:ext cx="0" cy="0"/>
-          <a:chOff x="0" y="0"/>
-          <a:chExt cx="0" cy="0"/>
-        </a:xfrm>
-      </p:grpSpPr>
-      <p:sp>
-        <p:nvSpPr>
-          <p:cNvPr id="2" name="Title 1"/>
-          <p:cNvSpPr>
-            <a:spLocks noGrp="1"/>
-          </p:cNvSpPr>
-          <p:nvPr>
-            <p:ph type="title"/>
-          </p:nvPr>
-        </p:nvSpPr>
-        <p:spPr/>
-        <p:txBody>
-          <a:bodyPr/>
-          <a:lstStyle/>
-          <a:p>
-            <a:pPr lvl="0" indent="0" marL="0">
-              <a:buNone/>
-            </a:pPr>
-            <a:r>
-              <a:rPr/>
-              <a:t>Un projet inspiré d’exemples réussis</a:t>
-            </a:r>
-          </a:p>
-        </p:txBody>
-      </p:sp>
-      <p:sp>
-        <p:nvSpPr>
-          <p:cNvPr id="3" name="Content Placeholder 2"/>
-          <p:cNvSpPr>
-            <a:spLocks noGrp="1"/>
-          </p:cNvSpPr>
-          <p:nvPr>
-            <p:ph idx="1"/>
-          </p:nvPr>
-        </p:nvSpPr>
-        <p:spPr/>
-        <p:txBody>
-          <a:bodyPr/>
-          <a:lstStyle/>
-          <a:p>
-            <a:pPr lvl="0"/>
-            <a:r>
-              <a:rPr/>
-              <a:t>Marguerittes (Gard) </a:t>
-            </a:r>
-            <a:r>
-              <a:rPr>
-                <a:hlinkClick r:id="rId2"/>
-              </a:rPr>
-              <a:t>(site)</a:t>
-            </a:r>
-          </a:p>
-          <a:p>
-            <a:pPr lvl="0"/>
-            <a:r>
-              <a:rPr/>
-              <a:t>Végétaliser Banyuls, c’est permis ! </a:t>
-            </a:r>
-            <a:r>
-              <a:rPr>
-                <a:hlinkClick r:id="rId3"/>
-              </a:rPr>
-              <a:t>(site)</a:t>
-            </a:r>
-          </a:p>
-          <a:p>
-            <a:pPr lvl="0"/>
-            <a:r>
-              <a:rPr/>
-              <a:t>Saint-Nazaire-d’Aude : La commune fournit un « Kit de plantation » complet (plante locale, paillage, terreau et tuteur de protection) dès que la fosse est créée par la mairie. </a:t>
-            </a:r>
-            <a:r>
-              <a:rPr>
-                <a:hlinkClick r:id="rId4"/>
-              </a:rPr>
-              <a:t>(site)</a:t>
-            </a:r>
-          </a:p>
-        </p:txBody>
-      </p:sp>
-    </p:spTree>
-  </p:cSld>
-</p:sld>
-</file>
-
-<file path=ppt/slides/slide7.xml><?xml version="1.0" encoding="utf-8"?>
-<p:sld xmlns:a="http://schemas.openxmlformats.org/drawingml/2006/main" xmlns:r="http://schemas.openxmlformats.org/officeDocument/2006/relationships" xmlns:p="http://schemas.openxmlformats.org/presentationml/2006/main">
-  <p:cSld>
-    <p:spTree>
-      <p:nvGrpSpPr>
-        <p:cNvPr id="1" name=""/>
-        <p:cNvGrpSpPr/>
-        <p:nvPr/>
-      </p:nvGrpSpPr>
-      <p:grpSpPr>
-        <a:xfrm>
-          <a:off x="0" y="0"/>
-          <a:ext cx="0" cy="0"/>
-          <a:chOff x="0" y="0"/>
-          <a:chExt cx="0" cy="0"/>
-        </a:xfrm>
-      </p:grpSpPr>
-      <p:sp>
-        <p:nvSpPr>
-          <p:cNvPr id="2" name="Title 1"/>
-          <p:cNvSpPr>
-            <a:spLocks noGrp="1"/>
-          </p:cNvSpPr>
-          <p:nvPr>
-            <p:ph type="title"/>
-          </p:nvPr>
-        </p:nvSpPr>
-        <p:spPr/>
-        <p:txBody>
-          <a:bodyPr/>
-          <a:lstStyle/>
-          <a:p>
-            <a:pPr lvl="0" indent="0" marL="0">
-              <a:buNone/>
-            </a:pPr>
-            <a:r>
-              <a:rPr/>
-              <a:t>Organismes officiels d’accompagnement</a:t>
-            </a:r>
-          </a:p>
-        </p:txBody>
-      </p:sp>
-      <p:sp>
-        <p:nvSpPr>
-          <p:cNvPr id="3" name="Content Placeholder 2"/>
-          <p:cNvSpPr>
-            <a:spLocks noGrp="1"/>
-          </p:cNvSpPr>
-          <p:nvPr>
-            <p:ph idx="1"/>
-          </p:nvPr>
-        </p:nvSpPr>
-        <p:spPr/>
-        <p:txBody>
-          <a:bodyPr/>
-          <a:lstStyle/>
-          <a:p>
-            <a:pPr lvl="0"/>
-            <a:r>
-              <a:rPr/>
-              <a:t>Le CAUE 82 (Conseil d’Architecture, d’Urbanisme et de l’Environnement) est un organisme investi d’une mission d’intérêt public.</a:t>
-            </a:r>
-          </a:p>
-          <a:p>
-            <a:pPr lvl="0"/>
-            <a:r>
-              <a:rPr/>
-              <a:t>Il propose un certain nombre de ressources pour ce type de projet.</a:t>
-            </a:r>
-          </a:p>
-          <a:p>
-            <a:pPr lvl="0"/>
-            <a:r>
-              <a:rPr>
-                <a:hlinkClick r:id="rId2"/>
-              </a:rPr>
-              <a:t>caue-occitanie :</a:t>
-            </a:r>
-            <a:r>
-              <a:rPr/>
-              <a:t> dossier permis de végétaliser</a:t>
-            </a:r>
-          </a:p>
-        </p:txBody>
-      </p:sp>
-    </p:spTree>
-  </p:cSld>
-</p:sld>
-</file>
-
-<file path=ppt/slides/slide8.xml><?xml version="1.0" encoding="utf-8"?>
-<p:sld xmlns:a="http://schemas.openxmlformats.org/drawingml/2006/main" xmlns:r="http://schemas.openxmlformats.org/officeDocument/2006/relationships" xmlns:p="http://schemas.openxmlformats.org/presentationml/2006/main">
-  <p:cSld>
-    <p:spTree>
-      <p:nvGrpSpPr>
-        <p:cNvPr id="1" name=""/>
-        <p:cNvGrpSpPr/>
-        <p:nvPr/>
-      </p:nvGrpSpPr>
-      <p:grpSpPr>
-        <a:xfrm>
-          <a:off x="0" y="0"/>
-          <a:ext cx="0" cy="0"/>
-          <a:chOff x="0" y="0"/>
-          <a:chExt cx="0" cy="0"/>
-        </a:xfrm>
-      </p:grpSpPr>
-      <p:sp>
-        <p:nvSpPr>
-          <p:cNvPr id="2" name="Title 1"/>
-          <p:cNvSpPr>
-            <a:spLocks noGrp="1"/>
-          </p:cNvSpPr>
-          <p:nvPr>
-            <p:ph type="title"/>
-          </p:nvPr>
-        </p:nvSpPr>
-        <p:spPr/>
-        <p:txBody>
-          <a:bodyPr/>
-          <a:lstStyle/>
-          <a:p>
-            <a:pPr lvl="0" indent="0" marL="0">
-              <a:buNone/>
-            </a:pPr>
-            <a:r>
-              <a:rPr/>
-              <a:t>Un partenariat simple entre la commune et les riverains</a:t>
-            </a:r>
-          </a:p>
-        </p:txBody>
-      </p:sp>
-      <p:sp>
-        <p:nvSpPr>
-          <p:cNvPr id="3" name="Content Placeholder 2"/>
-          <p:cNvSpPr>
-            <a:spLocks noGrp="1"/>
-          </p:cNvSpPr>
-          <p:nvPr>
-            <p:ph idx="1"/>
-          </p:nvPr>
-        </p:nvSpPr>
-        <p:spPr/>
-        <p:txBody>
-          <a:bodyPr/>
-          <a:lstStyle/>
-          <a:p>
-            <a:pPr lvl="0" indent="0" marL="0">
-              <a:buNone/>
-            </a:pPr>
-            <a:r>
-              <a:rPr b="1"/>
-              <a:t>Un dispositif communal de végétalisation des façades</a:t>
-            </a:r>
-          </a:p>
-          <a:p>
-            <a:pPr lvl="0"/>
-            <a:r>
-              <a:rPr/>
-              <a:t>Aide de la mairie pour la mise en place de fosses sur le domaine public.</a:t>
-            </a:r>
-          </a:p>
-          <a:p>
-            <a:pPr lvl="0"/>
-            <a:r>
-              <a:rPr/>
-              <a:t>Conseil technique sur le choix de la plante.</a:t>
-            </a:r>
-          </a:p>
-          <a:p>
-            <a:pPr lvl="0"/>
-            <a:r>
-              <a:rPr/>
-              <a:t>Éventuellement, fourniture du végétal à planter.</a:t>
-            </a:r>
-          </a:p>
-          <a:p>
-            <a:pPr lvl="0"/>
-            <a:r>
-              <a:rPr/>
-              <a:t>Engagement écrit du riverain pour l’entretien, la taille et l’arrosage.</a:t>
-            </a:r>
-          </a:p>
-        </p:txBody>
-      </p:sp>
-    </p:spTree>
-  </p:cSld>
-</p:sld>
-</file>
-
-<file path=ppt/slides/slide9.xml><?xml version="1.0" encoding="utf-8"?>
-<p:sld xmlns:a="http://schemas.openxmlformats.org/drawingml/2006/main" xmlns:r="http://schemas.openxmlformats.org/officeDocument/2006/relationships" xmlns:p="http://schemas.openxmlformats.org/presentationml/2006/main">
-  <p:cSld>
-    <p:spTree>
-      <p:nvGrpSpPr>
-        <p:cNvPr id="1" name=""/>
-        <p:cNvGrpSpPr/>
-        <p:nvPr/>
-      </p:nvGrpSpPr>
-      <p:grpSpPr>
-        <a:xfrm>
-          <a:off x="0" y="0"/>
-          <a:ext cx="0" cy="0"/>
-          <a:chOff x="0" y="0"/>
-          <a:chExt cx="0" cy="0"/>
-        </a:xfrm>
-      </p:grpSpPr>
-      <p:sp>
-        <p:nvSpPr>
-          <p:cNvPr id="2" name="Title 1"/>
-          <p:cNvSpPr>
-            <a:spLocks noGrp="1"/>
-          </p:cNvSpPr>
-          <p:nvPr>
-            <p:ph type="title"/>
-          </p:nvPr>
-        </p:nvSpPr>
-        <p:spPr/>
-        <p:txBody>
-          <a:bodyPr/>
-          <a:lstStyle/>
-          <a:p>
-            <a:pPr lvl="0" indent="0" marL="0">
-              <a:buNone/>
-            </a:pPr>
-            <a:r>
-              <a:rPr/>
-              <a:t>Faire connaître le projet</a:t>
-            </a:r>
-          </a:p>
-        </p:txBody>
-      </p:sp>
-      <p:sp>
-        <p:nvSpPr>
-          <p:cNvPr id="3" name="Content Placeholder 2"/>
-          <p:cNvSpPr>
-            <a:spLocks noGrp="1"/>
-          </p:cNvSpPr>
-          <p:nvPr>
-            <p:ph idx="1"/>
-          </p:nvPr>
-        </p:nvSpPr>
-        <p:spPr/>
-        <p:txBody>
-          <a:bodyPr/>
-          <a:lstStyle/>
-          <a:p>
-            <a:pPr lvl="0" indent="0" marL="0">
-              <a:buNone/>
-            </a:pPr>
-            <a:r>
-              <a:rPr b="1"/>
-              <a:t>Communication municipale</a:t>
-            </a:r>
-          </a:p>
-          <a:p>
-            <a:pPr lvl="0"/>
-            <a:r>
-              <a:rPr/>
-              <a:t>Affichage en mairie, sur panneaux.</a:t>
-            </a:r>
-          </a:p>
-          <a:p>
-            <a:pPr lvl="0"/>
-            <a:r>
-              <a:rPr/>
-              <a:t>Page dans IntraMuros</a:t>
-            </a:r>
-          </a:p>
-          <a:p>
-            <a:pPr lvl="0"/>
-            <a:r>
-              <a:rPr/>
-              <a:t>Réunion publique de démarrage.</a:t>
-            </a:r>
-          </a:p>
-          <a:p>
-            <a:pPr lvl="0"/>
-            <a:r>
-              <a:rPr/>
-              <a:t>Publication dans bulletin, avec convention à remplir en janvier.</a:t>
-            </a:r>
-          </a:p>
-          <a:p>
-            <a:pPr lvl="0"/>
-            <a:r>
-              <a:rPr/>
-              <a:t>Premier bilan dans bulletin en juillet.</a:t>
             </a:r>
           </a:p>
         </p:txBody>
